--- a/Strategy_Sarsabz_Sep/workspace/out/Sarsabz_case1_deck-v4.pptx
+++ b/Strategy_Sarsabz_Sep/workspace/out/Sarsabz_case1_deck-v4.pptx
@@ -5,30 +5,30 @@
     <p:sldMasterId id="2147483648" r:id="rId1"/>
   </p:sldMasterIdLst>
   <p:sldIdLst>
-    <p:sldId id="256" r:id="rId7"/>
-    <p:sldId id="257" r:id="rId8"/>
-    <p:sldId id="258" r:id="rId9"/>
-    <p:sldId id="259" r:id="rId10"/>
-    <p:sldId id="260" r:id="rId11"/>
-    <p:sldId id="261" r:id="rId12"/>
-    <p:sldId id="262" r:id="rId13"/>
-    <p:sldId id="263" r:id="rId14"/>
-    <p:sldId id="264" r:id="rId15"/>
-    <p:sldId id="265" r:id="rId16"/>
-    <p:sldId id="266" r:id="rId17"/>
-    <p:sldId id="267" r:id="rId18"/>
-    <p:sldId id="268" r:id="rId19"/>
-    <p:sldId id="269" r:id="rId20"/>
-    <p:sldId id="270" r:id="rId21"/>
-    <p:sldId id="271" r:id="rId22"/>
-    <p:sldId id="272" r:id="rId23"/>
-    <p:sldId id="273" r:id="rId24"/>
-    <p:sldId id="274" r:id="rId25"/>
-    <p:sldId id="275" r:id="rId26"/>
-    <p:sldId id="276" r:id="rId27"/>
-    <p:sldId id="277" r:id="rId28"/>
+    <p:sldId id="256" r:id="rId2"/>
+    <p:sldId id="257" r:id="rId3"/>
+    <p:sldId id="258" r:id="rId4"/>
+    <p:sldId id="259" r:id="rId5"/>
+    <p:sldId id="260" r:id="rId6"/>
+    <p:sldId id="261" r:id="rId7"/>
+    <p:sldId id="262" r:id="rId8"/>
+    <p:sldId id="263" r:id="rId9"/>
+    <p:sldId id="264" r:id="rId10"/>
+    <p:sldId id="265" r:id="rId11"/>
+    <p:sldId id="266" r:id="rId12"/>
+    <p:sldId id="267" r:id="rId13"/>
+    <p:sldId id="268" r:id="rId14"/>
+    <p:sldId id="269" r:id="rId15"/>
+    <p:sldId id="270" r:id="rId16"/>
+    <p:sldId id="271" r:id="rId17"/>
+    <p:sldId id="272" r:id="rId18"/>
+    <p:sldId id="273" r:id="rId19"/>
+    <p:sldId id="274" r:id="rId20"/>
+    <p:sldId id="275" r:id="rId21"/>
+    <p:sldId id="276" r:id="rId22"/>
+    <p:sldId id="277" r:id="rId23"/>
   </p:sldIdLst>
-  <p:sldSz cx="12191695" cy="6858000" type="screen4x3"/>
+  <p:sldSz cx="12192000" cy="6858000"/>
   <p:notesSz cx="6858000" cy="9144000"/>
   <p:defaultTextStyle>
     <a:defPPr>
@@ -125,6 +125,22 @@
       </a:defRPr>
     </a:lvl9pPr>
   </p:defaultTextStyle>
+  <p:extLst>
+    <p:ext uri="{EFAFB233-063F-42B5-8137-9DF3F51BA10A}">
+      <p15:sldGuideLst xmlns:p15="http://schemas.microsoft.com/office/powerpoint/2012/main">
+        <p15:guide id="1" orient="horz" pos="2160">
+          <p15:clr>
+            <a:srgbClr val="A4A3A4"/>
+          </p15:clr>
+        </p15:guide>
+        <p15:guide id="2" pos="2880">
+          <p15:clr>
+            <a:srgbClr val="A4A3A4"/>
+          </p15:clr>
+        </p15:guide>
+      </p15:sldGuideLst>
+    </p:ext>
+  </p:extLst>
 </p:presentation>
 </file>
 
@@ -166,10 +182,9 @@
           <a:lstStyle/>
           <a:p>
             <a:r>
-              <a:rPr lang="en-US" smtClean="0"/>
+              <a:rPr lang="en-US"/>
               <a:t>Click to edit Master title style</a:t>
             </a:r>
-            <a:endParaRPr lang="en-US"/>
           </a:p>
         </p:txBody>
       </p:sp>
@@ -285,10 +300,9 @@
           </a:lstStyle>
           <a:p>
             <a:r>
-              <a:rPr lang="en-US" smtClean="0"/>
+              <a:rPr lang="en-US"/>
               <a:t>Click to edit Master subtitle style</a:t>
             </a:r>
-            <a:endParaRPr lang="en-US"/>
           </a:p>
         </p:txBody>
       </p:sp>
@@ -309,7 +323,7 @@
           <a:p>
             <a:fld id="{5BCAD085-E8A6-8845-BD4E-CB4CCA059FC4}" type="datetimeFigureOut">
               <a:rPr lang="en-US" smtClean="0"/>
-              <a:t>1/27/13</a:t>
+              <a:t>9/16/2026</a:t>
             </a:fld>
             <a:endParaRPr lang="en-US"/>
           </a:p>
@@ -403,10 +417,9 @@
           <a:lstStyle/>
           <a:p>
             <a:r>
-              <a:rPr lang="en-US" smtClean="0"/>
+              <a:rPr lang="en-US"/>
               <a:t>Click to edit Master title style</a:t>
             </a:r>
-            <a:endParaRPr lang="en-US"/>
           </a:p>
         </p:txBody>
       </p:sp>
@@ -427,38 +440,37 @@
           <a:p>
             <a:pPr lvl="0"/>
             <a:r>
-              <a:rPr lang="en-US" smtClean="0"/>
+              <a:rPr lang="en-US"/>
               <a:t>Click to edit Master text styles</a:t>
             </a:r>
           </a:p>
           <a:p>
             <a:pPr lvl="1"/>
             <a:r>
-              <a:rPr lang="en-US" smtClean="0"/>
+              <a:rPr lang="en-US"/>
               <a:t>Second level</a:t>
             </a:r>
           </a:p>
           <a:p>
             <a:pPr lvl="2"/>
             <a:r>
-              <a:rPr lang="en-US" smtClean="0"/>
+              <a:rPr lang="en-US"/>
               <a:t>Third level</a:t>
             </a:r>
           </a:p>
           <a:p>
             <a:pPr lvl="3"/>
             <a:r>
-              <a:rPr lang="en-US" smtClean="0"/>
+              <a:rPr lang="en-US"/>
               <a:t>Fourth level</a:t>
             </a:r>
           </a:p>
           <a:p>
             <a:pPr lvl="4"/>
             <a:r>
-              <a:rPr lang="en-US" smtClean="0"/>
+              <a:rPr lang="en-US"/>
               <a:t>Fifth level</a:t>
             </a:r>
-            <a:endParaRPr lang="en-US"/>
           </a:p>
         </p:txBody>
       </p:sp>
@@ -479,7 +491,7 @@
           <a:p>
             <a:fld id="{5BCAD085-E8A6-8845-BD4E-CB4CCA059FC4}" type="datetimeFigureOut">
               <a:rPr lang="en-US" smtClean="0"/>
-              <a:t>1/27/13</a:t>
+              <a:t>9/16/2026</a:t>
             </a:fld>
             <a:endParaRPr lang="en-US"/>
           </a:p>
@@ -578,10 +590,9 @@
           <a:lstStyle/>
           <a:p>
             <a:r>
-              <a:rPr lang="en-US" smtClean="0"/>
+              <a:rPr lang="en-US"/>
               <a:t>Click to edit Master title style</a:t>
             </a:r>
-            <a:endParaRPr lang="en-US"/>
           </a:p>
         </p:txBody>
       </p:sp>
@@ -607,38 +618,37 @@
           <a:p>
             <a:pPr lvl="0"/>
             <a:r>
-              <a:rPr lang="en-US" smtClean="0"/>
+              <a:rPr lang="en-US"/>
               <a:t>Click to edit Master text styles</a:t>
             </a:r>
           </a:p>
           <a:p>
             <a:pPr lvl="1"/>
             <a:r>
-              <a:rPr lang="en-US" smtClean="0"/>
+              <a:rPr lang="en-US"/>
               <a:t>Second level</a:t>
             </a:r>
           </a:p>
           <a:p>
             <a:pPr lvl="2"/>
             <a:r>
-              <a:rPr lang="en-US" smtClean="0"/>
+              <a:rPr lang="en-US"/>
               <a:t>Third level</a:t>
             </a:r>
           </a:p>
           <a:p>
             <a:pPr lvl="3"/>
             <a:r>
-              <a:rPr lang="en-US" smtClean="0"/>
+              <a:rPr lang="en-US"/>
               <a:t>Fourth level</a:t>
             </a:r>
           </a:p>
           <a:p>
             <a:pPr lvl="4"/>
             <a:r>
-              <a:rPr lang="en-US" smtClean="0"/>
+              <a:rPr lang="en-US"/>
               <a:t>Fifth level</a:t>
             </a:r>
-            <a:endParaRPr lang="en-US"/>
           </a:p>
         </p:txBody>
       </p:sp>
@@ -659,7 +669,7 @@
           <a:p>
             <a:fld id="{5BCAD085-E8A6-8845-BD4E-CB4CCA059FC4}" type="datetimeFigureOut">
               <a:rPr lang="en-US" smtClean="0"/>
-              <a:t>1/27/13</a:t>
+              <a:t>9/16/2026</a:t>
             </a:fld>
             <a:endParaRPr lang="en-US"/>
           </a:p>
@@ -753,10 +763,9 @@
           <a:lstStyle/>
           <a:p>
             <a:r>
-              <a:rPr lang="en-US" smtClean="0"/>
+              <a:rPr lang="en-US"/>
               <a:t>Click to edit Master title style</a:t>
             </a:r>
-            <a:endParaRPr lang="en-US"/>
           </a:p>
         </p:txBody>
       </p:sp>
@@ -777,38 +786,37 @@
           <a:p>
             <a:pPr lvl="0"/>
             <a:r>
-              <a:rPr lang="en-US" smtClean="0"/>
+              <a:rPr lang="en-US"/>
               <a:t>Click to edit Master text styles</a:t>
             </a:r>
           </a:p>
           <a:p>
             <a:pPr lvl="1"/>
             <a:r>
-              <a:rPr lang="en-US" smtClean="0"/>
+              <a:rPr lang="en-US"/>
               <a:t>Second level</a:t>
             </a:r>
           </a:p>
           <a:p>
             <a:pPr lvl="2"/>
             <a:r>
-              <a:rPr lang="en-US" smtClean="0"/>
+              <a:rPr lang="en-US"/>
               <a:t>Third level</a:t>
             </a:r>
           </a:p>
           <a:p>
             <a:pPr lvl="3"/>
             <a:r>
-              <a:rPr lang="en-US" smtClean="0"/>
+              <a:rPr lang="en-US"/>
               <a:t>Fourth level</a:t>
             </a:r>
           </a:p>
           <a:p>
             <a:pPr lvl="4"/>
             <a:r>
-              <a:rPr lang="en-US" smtClean="0"/>
+              <a:rPr lang="en-US"/>
               <a:t>Fifth level</a:t>
             </a:r>
-            <a:endParaRPr lang="en-US"/>
           </a:p>
         </p:txBody>
       </p:sp>
@@ -829,7 +837,7 @@
           <a:p>
             <a:fld id="{5BCAD085-E8A6-8845-BD4E-CB4CCA059FC4}" type="datetimeFigureOut">
               <a:rPr lang="en-US" smtClean="0"/>
-              <a:t>1/27/13</a:t>
+              <a:t>9/16/2026</a:t>
             </a:fld>
             <a:endParaRPr lang="en-US"/>
           </a:p>
@@ -932,10 +940,9 @@
           </a:lstStyle>
           <a:p>
             <a:r>
-              <a:rPr lang="en-US" smtClean="0"/>
+              <a:rPr lang="en-US"/>
               <a:t>Click to edit Master title style</a:t>
             </a:r>
-            <a:endParaRPr lang="en-US"/>
           </a:p>
         </p:txBody>
       </p:sp>
@@ -1052,7 +1059,7 @@
           <a:p>
             <a:pPr lvl="0"/>
             <a:r>
-              <a:rPr lang="en-US" smtClean="0"/>
+              <a:rPr lang="en-US"/>
               <a:t>Click to edit Master text styles</a:t>
             </a:r>
           </a:p>
@@ -1075,7 +1082,7 @@
           <a:p>
             <a:fld id="{5BCAD085-E8A6-8845-BD4E-CB4CCA059FC4}" type="datetimeFigureOut">
               <a:rPr lang="en-US" smtClean="0"/>
-              <a:t>1/27/13</a:t>
+              <a:t>9/16/2026</a:t>
             </a:fld>
             <a:endParaRPr lang="en-US"/>
           </a:p>
@@ -1169,10 +1176,9 @@
           <a:lstStyle/>
           <a:p>
             <a:r>
-              <a:rPr lang="en-US" smtClean="0"/>
+              <a:rPr lang="en-US"/>
               <a:t>Click to edit Master title style</a:t>
             </a:r>
-            <a:endParaRPr lang="en-US"/>
           </a:p>
         </p:txBody>
       </p:sp>
@@ -1226,38 +1232,37 @@
           <a:p>
             <a:pPr lvl="0"/>
             <a:r>
-              <a:rPr lang="en-US" smtClean="0"/>
+              <a:rPr lang="en-US"/>
               <a:t>Click to edit Master text styles</a:t>
             </a:r>
           </a:p>
           <a:p>
             <a:pPr lvl="1"/>
             <a:r>
-              <a:rPr lang="en-US" smtClean="0"/>
+              <a:rPr lang="en-US"/>
               <a:t>Second level</a:t>
             </a:r>
           </a:p>
           <a:p>
             <a:pPr lvl="2"/>
             <a:r>
-              <a:rPr lang="en-US" smtClean="0"/>
+              <a:rPr lang="en-US"/>
               <a:t>Third level</a:t>
             </a:r>
           </a:p>
           <a:p>
             <a:pPr lvl="3"/>
             <a:r>
-              <a:rPr lang="en-US" smtClean="0"/>
+              <a:rPr lang="en-US"/>
               <a:t>Fourth level</a:t>
             </a:r>
           </a:p>
           <a:p>
             <a:pPr lvl="4"/>
             <a:r>
-              <a:rPr lang="en-US" smtClean="0"/>
+              <a:rPr lang="en-US"/>
               <a:t>Fifth level</a:t>
             </a:r>
-            <a:endParaRPr lang="en-US"/>
           </a:p>
         </p:txBody>
       </p:sp>
@@ -1311,38 +1316,37 @@
           <a:p>
             <a:pPr lvl="0"/>
             <a:r>
-              <a:rPr lang="en-US" smtClean="0"/>
+              <a:rPr lang="en-US"/>
               <a:t>Click to edit Master text styles</a:t>
             </a:r>
           </a:p>
           <a:p>
             <a:pPr lvl="1"/>
             <a:r>
-              <a:rPr lang="en-US" smtClean="0"/>
+              <a:rPr lang="en-US"/>
               <a:t>Second level</a:t>
             </a:r>
           </a:p>
           <a:p>
             <a:pPr lvl="2"/>
             <a:r>
-              <a:rPr lang="en-US" smtClean="0"/>
+              <a:rPr lang="en-US"/>
               <a:t>Third level</a:t>
             </a:r>
           </a:p>
           <a:p>
             <a:pPr lvl="3"/>
             <a:r>
-              <a:rPr lang="en-US" smtClean="0"/>
+              <a:rPr lang="en-US"/>
               <a:t>Fourth level</a:t>
             </a:r>
           </a:p>
           <a:p>
             <a:pPr lvl="4"/>
             <a:r>
-              <a:rPr lang="en-US" smtClean="0"/>
+              <a:rPr lang="en-US"/>
               <a:t>Fifth level</a:t>
             </a:r>
-            <a:endParaRPr lang="en-US"/>
           </a:p>
         </p:txBody>
       </p:sp>
@@ -1363,7 +1367,7 @@
           <a:p>
             <a:fld id="{5BCAD085-E8A6-8845-BD4E-CB4CCA059FC4}" type="datetimeFigureOut">
               <a:rPr lang="en-US" smtClean="0"/>
-              <a:t>1/27/13</a:t>
+              <a:t>9/16/2026</a:t>
             </a:fld>
             <a:endParaRPr lang="en-US"/>
           </a:p>
@@ -1461,10 +1465,9 @@
           </a:lstStyle>
           <a:p>
             <a:r>
-              <a:rPr lang="en-US" smtClean="0"/>
+              <a:rPr lang="en-US"/>
               <a:t>Click to edit Master title style</a:t>
             </a:r>
-            <a:endParaRPr lang="en-US"/>
           </a:p>
         </p:txBody>
       </p:sp>
@@ -1527,7 +1530,7 @@
           <a:p>
             <a:pPr lvl="0"/>
             <a:r>
-              <a:rPr lang="en-US" smtClean="0"/>
+              <a:rPr lang="en-US"/>
               <a:t>Click to edit Master text styles</a:t>
             </a:r>
           </a:p>
@@ -1583,38 +1586,37 @@
           <a:p>
             <a:pPr lvl="0"/>
             <a:r>
-              <a:rPr lang="en-US" smtClean="0"/>
+              <a:rPr lang="en-US"/>
               <a:t>Click to edit Master text styles</a:t>
             </a:r>
           </a:p>
           <a:p>
             <a:pPr lvl="1"/>
             <a:r>
-              <a:rPr lang="en-US" smtClean="0"/>
+              <a:rPr lang="en-US"/>
               <a:t>Second level</a:t>
             </a:r>
           </a:p>
           <a:p>
             <a:pPr lvl="2"/>
             <a:r>
-              <a:rPr lang="en-US" smtClean="0"/>
+              <a:rPr lang="en-US"/>
               <a:t>Third level</a:t>
             </a:r>
           </a:p>
           <a:p>
             <a:pPr lvl="3"/>
             <a:r>
-              <a:rPr lang="en-US" smtClean="0"/>
+              <a:rPr lang="en-US"/>
               <a:t>Fourth level</a:t>
             </a:r>
           </a:p>
           <a:p>
             <a:pPr lvl="4"/>
             <a:r>
-              <a:rPr lang="en-US" smtClean="0"/>
+              <a:rPr lang="en-US"/>
               <a:t>Fifth level</a:t>
             </a:r>
-            <a:endParaRPr lang="en-US"/>
           </a:p>
         </p:txBody>
       </p:sp>
@@ -1677,7 +1679,7 @@
           <a:p>
             <a:pPr lvl="0"/>
             <a:r>
-              <a:rPr lang="en-US" smtClean="0"/>
+              <a:rPr lang="en-US"/>
               <a:t>Click to edit Master text styles</a:t>
             </a:r>
           </a:p>
@@ -1733,38 +1735,37 @@
           <a:p>
             <a:pPr lvl="0"/>
             <a:r>
-              <a:rPr lang="en-US" smtClean="0"/>
+              <a:rPr lang="en-US"/>
               <a:t>Click to edit Master text styles</a:t>
             </a:r>
           </a:p>
           <a:p>
             <a:pPr lvl="1"/>
             <a:r>
-              <a:rPr lang="en-US" smtClean="0"/>
+              <a:rPr lang="en-US"/>
               <a:t>Second level</a:t>
             </a:r>
           </a:p>
           <a:p>
             <a:pPr lvl="2"/>
             <a:r>
-              <a:rPr lang="en-US" smtClean="0"/>
+              <a:rPr lang="en-US"/>
               <a:t>Third level</a:t>
             </a:r>
           </a:p>
           <a:p>
             <a:pPr lvl="3"/>
             <a:r>
-              <a:rPr lang="en-US" smtClean="0"/>
+              <a:rPr lang="en-US"/>
               <a:t>Fourth level</a:t>
             </a:r>
           </a:p>
           <a:p>
             <a:pPr lvl="4"/>
             <a:r>
-              <a:rPr lang="en-US" smtClean="0"/>
+              <a:rPr lang="en-US"/>
               <a:t>Fifth level</a:t>
             </a:r>
-            <a:endParaRPr lang="en-US"/>
           </a:p>
         </p:txBody>
       </p:sp>
@@ -1785,7 +1786,7 @@
           <a:p>
             <a:fld id="{5BCAD085-E8A6-8845-BD4E-CB4CCA059FC4}" type="datetimeFigureOut">
               <a:rPr lang="en-US" smtClean="0"/>
-              <a:t>1/27/13</a:t>
+              <a:t>9/16/2026</a:t>
             </a:fld>
             <a:endParaRPr lang="en-US"/>
           </a:p>
@@ -1879,10 +1880,9 @@
           <a:lstStyle/>
           <a:p>
             <a:r>
-              <a:rPr lang="en-US" smtClean="0"/>
+              <a:rPr lang="en-US"/>
               <a:t>Click to edit Master title style</a:t>
             </a:r>
-            <a:endParaRPr lang="en-US"/>
           </a:p>
         </p:txBody>
       </p:sp>
@@ -1903,7 +1903,7 @@
           <a:p>
             <a:fld id="{5BCAD085-E8A6-8845-BD4E-CB4CCA059FC4}" type="datetimeFigureOut">
               <a:rPr lang="en-US" smtClean="0"/>
-              <a:t>1/27/13</a:t>
+              <a:t>9/16/2026</a:t>
             </a:fld>
             <a:endParaRPr lang="en-US"/>
           </a:p>
@@ -1998,7 +1998,7 @@
           <a:p>
             <a:fld id="{5BCAD085-E8A6-8845-BD4E-CB4CCA059FC4}" type="datetimeFigureOut">
               <a:rPr lang="en-US" smtClean="0"/>
-              <a:t>1/27/13</a:t>
+              <a:t>9/16/2026</a:t>
             </a:fld>
             <a:endParaRPr lang="en-US"/>
           </a:p>
@@ -2101,10 +2101,9 @@
           </a:lstStyle>
           <a:p>
             <a:r>
-              <a:rPr lang="en-US" smtClean="0"/>
+              <a:rPr lang="en-US"/>
               <a:t>Click to edit Master title style</a:t>
             </a:r>
-            <a:endParaRPr lang="en-US"/>
           </a:p>
         </p:txBody>
       </p:sp>
@@ -2158,38 +2157,37 @@
           <a:p>
             <a:pPr lvl="0"/>
             <a:r>
-              <a:rPr lang="en-US" smtClean="0"/>
+              <a:rPr lang="en-US"/>
               <a:t>Click to edit Master text styles</a:t>
             </a:r>
           </a:p>
           <a:p>
             <a:pPr lvl="1"/>
             <a:r>
-              <a:rPr lang="en-US" smtClean="0"/>
+              <a:rPr lang="en-US"/>
               <a:t>Second level</a:t>
             </a:r>
           </a:p>
           <a:p>
             <a:pPr lvl="2"/>
             <a:r>
-              <a:rPr lang="en-US" smtClean="0"/>
+              <a:rPr lang="en-US"/>
               <a:t>Third level</a:t>
             </a:r>
           </a:p>
           <a:p>
             <a:pPr lvl="3"/>
             <a:r>
-              <a:rPr lang="en-US" smtClean="0"/>
+              <a:rPr lang="en-US"/>
               <a:t>Fourth level</a:t>
             </a:r>
           </a:p>
           <a:p>
             <a:pPr lvl="4"/>
             <a:r>
-              <a:rPr lang="en-US" smtClean="0"/>
+              <a:rPr lang="en-US"/>
               <a:t>Fifth level</a:t>
             </a:r>
-            <a:endParaRPr lang="en-US"/>
           </a:p>
         </p:txBody>
       </p:sp>
@@ -2252,7 +2250,7 @@
           <a:p>
             <a:pPr lvl="0"/>
             <a:r>
-              <a:rPr lang="en-US" smtClean="0"/>
+              <a:rPr lang="en-US"/>
               <a:t>Click to edit Master text styles</a:t>
             </a:r>
           </a:p>
@@ -2275,7 +2273,7 @@
           <a:p>
             <a:fld id="{5BCAD085-E8A6-8845-BD4E-CB4CCA059FC4}" type="datetimeFigureOut">
               <a:rPr lang="en-US" smtClean="0"/>
-              <a:t>1/27/13</a:t>
+              <a:t>9/16/2026</a:t>
             </a:fld>
             <a:endParaRPr lang="en-US"/>
           </a:p>
@@ -2378,10 +2376,9 @@
           </a:lstStyle>
           <a:p>
             <a:r>
-              <a:rPr lang="en-US" smtClean="0"/>
+              <a:rPr lang="en-US"/>
               <a:t>Click to edit Master title style</a:t>
             </a:r>
-            <a:endParaRPr lang="en-US"/>
           </a:p>
         </p:txBody>
       </p:sp>
@@ -2505,7 +2502,7 @@
           <a:p>
             <a:pPr lvl="0"/>
             <a:r>
-              <a:rPr lang="en-US" smtClean="0"/>
+              <a:rPr lang="en-US"/>
               <a:t>Click to edit Master text styles</a:t>
             </a:r>
           </a:p>
@@ -2528,7 +2525,7 @@
           <a:p>
             <a:fld id="{5BCAD085-E8A6-8845-BD4E-CB4CCA059FC4}" type="datetimeFigureOut">
               <a:rPr lang="en-US" smtClean="0"/>
-              <a:t>1/27/13</a:t>
+              <a:t>9/16/2026</a:t>
             </a:fld>
             <a:endParaRPr lang="en-US"/>
           </a:p>
@@ -2637,10 +2634,9 @@
           <a:lstStyle/>
           <a:p>
             <a:r>
-              <a:rPr lang="en-US" smtClean="0"/>
+              <a:rPr lang="en-US"/>
               <a:t>Click to edit Master title style</a:t>
             </a:r>
-            <a:endParaRPr lang="en-US"/>
           </a:p>
         </p:txBody>
       </p:sp>
@@ -2671,38 +2667,37 @@
           <a:p>
             <a:pPr lvl="0"/>
             <a:r>
-              <a:rPr lang="en-US" smtClean="0"/>
+              <a:rPr lang="en-US"/>
               <a:t>Click to edit Master text styles</a:t>
             </a:r>
           </a:p>
           <a:p>
             <a:pPr lvl="1"/>
             <a:r>
-              <a:rPr lang="en-US" smtClean="0"/>
+              <a:rPr lang="en-US"/>
               <a:t>Second level</a:t>
             </a:r>
           </a:p>
           <a:p>
             <a:pPr lvl="2"/>
             <a:r>
-              <a:rPr lang="en-US" smtClean="0"/>
+              <a:rPr lang="en-US"/>
               <a:t>Third level</a:t>
             </a:r>
           </a:p>
           <a:p>
             <a:pPr lvl="3"/>
             <a:r>
-              <a:rPr lang="en-US" smtClean="0"/>
+              <a:rPr lang="en-US"/>
               <a:t>Fourth level</a:t>
             </a:r>
           </a:p>
           <a:p>
             <a:pPr lvl="4"/>
             <a:r>
-              <a:rPr lang="en-US" smtClean="0"/>
+              <a:rPr lang="en-US"/>
               <a:t>Fifth level</a:t>
             </a:r>
-            <a:endParaRPr lang="en-US"/>
           </a:p>
         </p:txBody>
       </p:sp>
@@ -2741,7 +2736,7 @@
           <a:p>
             <a:fld id="{5BCAD085-E8A6-8845-BD4E-CB4CCA059FC4}" type="datetimeFigureOut">
               <a:rPr lang="en-US" smtClean="0"/>
-              <a:t>1/27/13</a:t>
+              <a:t>9/16/2026</a:t>
             </a:fld>
             <a:endParaRPr lang="en-US"/>
           </a:p>
@@ -3100,7 +3095,7 @@
 </file>
 
 <file path=ppt/slides/slide1.xml><?xml version="1.0" encoding="utf-8"?>
-<p:sld xmlns:a="http://schemas.openxmlformats.org/drawingml/2006/main" xmlns:p="http://schemas.openxmlformats.org/presentationml/2006/main" xmlns:r="http://schemas.openxmlformats.org/officeDocument/2006/relationships">
+<p:sld xmlns:a="http://schemas.openxmlformats.org/drawingml/2006/main" xmlns:r="http://schemas.openxmlformats.org/officeDocument/2006/relationships" xmlns:p="http://schemas.openxmlformats.org/presentationml/2006/main">
   <p:cSld>
     <p:spTree>
       <p:nvGrpSpPr>
@@ -3108,7 +3103,14 @@
         <p:cNvGrpSpPr/>
         <p:nvPr/>
       </p:nvGrpSpPr>
-      <p:grpSpPr/>
+      <p:grpSpPr>
+        <a:xfrm>
+          <a:off x="0" y="0"/>
+          <a:ext cx="0" cy="0"/>
+          <a:chOff x="0" y="0"/>
+          <a:chExt cx="0" cy="0"/>
+        </a:xfrm>
+      </p:grpSpPr>
       <p:sp>
         <p:nvSpPr>
           <p:cNvPr id="2" name="Rectangle 1"/>
@@ -3150,6 +3152,7 @@
           <a:lstStyle/>
           <a:p>
             <a:pPr algn="ctr"/>
+            <a:endParaRPr/>
           </a:p>
         </p:txBody>
       </p:sp>
@@ -3194,6 +3197,7 @@
           <a:lstStyle/>
           <a:p>
             <a:pPr algn="ctr"/>
+            <a:endParaRPr/>
           </a:p>
         </p:txBody>
       </p:sp>
@@ -3214,7 +3218,7 @@
           <a:noFill/>
         </p:spPr>
         <p:txBody>
-          <a:bodyPr wrap="square" lIns="0" rIns="0" tIns="0" bIns="0">
+          <a:bodyPr wrap="square" lIns="0" tIns="0" rIns="0" bIns="0">
             <a:spAutoFit/>
           </a:bodyPr>
           <a:lstStyle/>
@@ -3253,7 +3257,7 @@
           <a:noFill/>
         </p:spPr>
         <p:txBody>
-          <a:bodyPr wrap="square" lIns="0" rIns="0" tIns="0" bIns="0">
+          <a:bodyPr wrap="square" lIns="0" tIns="0" rIns="0" bIns="0">
             <a:spAutoFit/>
           </a:bodyPr>
           <a:lstStyle/>
@@ -3292,7 +3296,7 @@
           <a:noFill/>
         </p:spPr>
         <p:txBody>
-          <a:bodyPr wrap="square" lIns="0" rIns="0" tIns="0" bIns="0">
+          <a:bodyPr wrap="square" lIns="0" tIns="0" rIns="0" bIns="0">
             <a:spAutoFit/>
           </a:bodyPr>
           <a:lstStyle/>
@@ -3331,7 +3335,7 @@
           <a:noFill/>
         </p:spPr>
         <p:txBody>
-          <a:bodyPr wrap="square" lIns="0" rIns="0" tIns="0" bIns="0">
+          <a:bodyPr wrap="square" lIns="0" tIns="0" rIns="0" bIns="0">
             <a:spAutoFit/>
           </a:bodyPr>
           <a:lstStyle/>
@@ -3386,7 +3390,7 @@
           <a:noFill/>
         </p:spPr>
         <p:txBody>
-          <a:bodyPr wrap="square" lIns="0" rIns="0" tIns="0" bIns="0">
+          <a:bodyPr wrap="square" lIns="0" tIns="0" rIns="0" bIns="0">
             <a:spAutoFit/>
           </a:bodyPr>
           <a:lstStyle/>
@@ -3417,7 +3421,7 @@
 </file>
 
 <file path=ppt/slides/slide10.xml><?xml version="1.0" encoding="utf-8"?>
-<p:sld xmlns:a="http://schemas.openxmlformats.org/drawingml/2006/main" xmlns:p="http://schemas.openxmlformats.org/presentationml/2006/main" xmlns:r="http://schemas.openxmlformats.org/officeDocument/2006/relationships">
+<p:sld xmlns:a="http://schemas.openxmlformats.org/drawingml/2006/main" xmlns:r="http://schemas.openxmlformats.org/officeDocument/2006/relationships" xmlns:p="http://schemas.openxmlformats.org/presentationml/2006/main">
   <p:cSld>
     <p:spTree>
       <p:nvGrpSpPr>
@@ -3425,7 +3429,14 @@
         <p:cNvGrpSpPr/>
         <p:nvPr/>
       </p:nvGrpSpPr>
-      <p:grpSpPr/>
+      <p:grpSpPr>
+        <a:xfrm>
+          <a:off x="0" y="0"/>
+          <a:ext cx="0" cy="0"/>
+          <a:chOff x="0" y="0"/>
+          <a:chExt cx="0" cy="0"/>
+        </a:xfrm>
+      </p:grpSpPr>
       <p:sp>
         <p:nvSpPr>
           <p:cNvPr id="2" name="Rectangle 1"/>
@@ -3467,6 +3478,7 @@
           <a:lstStyle/>
           <a:p>
             <a:pPr algn="ctr"/>
+            <a:endParaRPr/>
           </a:p>
         </p:txBody>
       </p:sp>
@@ -3487,7 +3499,7 @@
           <a:noFill/>
         </p:spPr>
         <p:txBody>
-          <a:bodyPr wrap="square" lIns="0" rIns="0" tIns="0" bIns="0">
+          <a:bodyPr wrap="square" lIns="0" tIns="0" rIns="0" bIns="0">
             <a:spAutoFit/>
           </a:bodyPr>
           <a:lstStyle/>
@@ -3526,7 +3538,7 @@
           <a:noFill/>
         </p:spPr>
         <p:txBody>
-          <a:bodyPr wrap="square" lIns="0" rIns="0" tIns="0" bIns="0">
+          <a:bodyPr wrap="square" lIns="0" tIns="0" rIns="0" bIns="0">
             <a:spAutoFit/>
           </a:bodyPr>
           <a:lstStyle/>
@@ -3589,6 +3601,7 @@
           <a:lstStyle/>
           <a:p>
             <a:pPr algn="ctr"/>
+            <a:endParaRPr/>
           </a:p>
         </p:txBody>
       </p:sp>
@@ -3609,7 +3622,7 @@
           <a:noFill/>
         </p:spPr>
         <p:txBody>
-          <a:bodyPr wrap="square" lIns="0" rIns="0" tIns="0" bIns="0">
+          <a:bodyPr wrap="square" lIns="0" tIns="0" rIns="0" bIns="0">
             <a:spAutoFit/>
           </a:bodyPr>
           <a:lstStyle/>
@@ -3672,6 +3685,7 @@
           <a:lstStyle/>
           <a:p>
             <a:pPr algn="ctr"/>
+            <a:endParaRPr/>
           </a:p>
         </p:txBody>
       </p:sp>
@@ -3692,7 +3706,7 @@
           <a:noFill/>
         </p:spPr>
         <p:txBody>
-          <a:bodyPr wrap="square" lIns="0" rIns="0" tIns="0" bIns="0">
+          <a:bodyPr wrap="square" lIns="0" tIns="0" rIns="0" bIns="0">
             <a:spAutoFit/>
           </a:bodyPr>
           <a:lstStyle/>
@@ -3731,7 +3745,7 @@
           <a:noFill/>
         </p:spPr>
         <p:txBody>
-          <a:bodyPr wrap="square" lIns="0" rIns="0" tIns="0" bIns="0">
+          <a:bodyPr wrap="square" lIns="0" tIns="0" rIns="0" bIns="0">
             <a:spAutoFit/>
           </a:bodyPr>
           <a:lstStyle/>
@@ -3770,7 +3784,7 @@
           <a:noFill/>
         </p:spPr>
         <p:txBody>
-          <a:bodyPr wrap="square" lIns="0" rIns="0" tIns="0" bIns="0">
+          <a:bodyPr wrap="square" lIns="0" tIns="0" rIns="0" bIns="0">
             <a:spAutoFit/>
           </a:bodyPr>
           <a:lstStyle/>
@@ -3881,6 +3895,7 @@
           <a:lstStyle/>
           <a:p>
             <a:pPr algn="ctr"/>
+            <a:endParaRPr/>
           </a:p>
         </p:txBody>
       </p:sp>
@@ -3901,7 +3916,7 @@
           <a:noFill/>
         </p:spPr>
         <p:txBody>
-          <a:bodyPr wrap="square" lIns="0" rIns="0" tIns="0" bIns="0">
+          <a:bodyPr wrap="square" lIns="0" tIns="0" rIns="0" bIns="0">
             <a:spAutoFit/>
           </a:bodyPr>
           <a:lstStyle/>
@@ -3940,7 +3955,7 @@
           <a:noFill/>
         </p:spPr>
         <p:txBody>
-          <a:bodyPr wrap="square" lIns="0" rIns="0" tIns="0" bIns="0">
+          <a:bodyPr wrap="square" lIns="0" tIns="0" rIns="0" bIns="0">
             <a:spAutoFit/>
           </a:bodyPr>
           <a:lstStyle/>
@@ -4011,7 +4026,7 @@
           <a:noFill/>
         </p:spPr>
         <p:txBody>
-          <a:bodyPr wrap="square" lIns="0" rIns="0" tIns="0" bIns="0">
+          <a:bodyPr wrap="square" lIns="0" tIns="0" rIns="0" bIns="0">
             <a:spAutoFit/>
           </a:bodyPr>
           <a:lstStyle/>
@@ -4042,7 +4057,7 @@
 </file>
 
 <file path=ppt/slides/slide11.xml><?xml version="1.0" encoding="utf-8"?>
-<p:sld xmlns:a="http://schemas.openxmlformats.org/drawingml/2006/main" xmlns:p="http://schemas.openxmlformats.org/presentationml/2006/main" xmlns:r="http://schemas.openxmlformats.org/officeDocument/2006/relationships">
+<p:sld xmlns:a="http://schemas.openxmlformats.org/drawingml/2006/main" xmlns:r="http://schemas.openxmlformats.org/officeDocument/2006/relationships" xmlns:p="http://schemas.openxmlformats.org/presentationml/2006/main">
   <p:cSld>
     <p:spTree>
       <p:nvGrpSpPr>
@@ -4050,7 +4065,14 @@
         <p:cNvGrpSpPr/>
         <p:nvPr/>
       </p:nvGrpSpPr>
-      <p:grpSpPr/>
+      <p:grpSpPr>
+        <a:xfrm>
+          <a:off x="0" y="0"/>
+          <a:ext cx="0" cy="0"/>
+          <a:chOff x="0" y="0"/>
+          <a:chExt cx="0" cy="0"/>
+        </a:xfrm>
+      </p:grpSpPr>
       <p:sp>
         <p:nvSpPr>
           <p:cNvPr id="2" name="Rectangle 1"/>
@@ -4092,6 +4114,7 @@
           <a:lstStyle/>
           <a:p>
             <a:pPr algn="ctr"/>
+            <a:endParaRPr/>
           </a:p>
         </p:txBody>
       </p:sp>
@@ -4112,7 +4135,7 @@
           <a:noFill/>
         </p:spPr>
         <p:txBody>
-          <a:bodyPr wrap="square" lIns="0" rIns="0" tIns="0" bIns="0">
+          <a:bodyPr wrap="square" lIns="0" tIns="0" rIns="0" bIns="0">
             <a:spAutoFit/>
           </a:bodyPr>
           <a:lstStyle/>
@@ -4151,7 +4174,7 @@
           <a:noFill/>
         </p:spPr>
         <p:txBody>
-          <a:bodyPr wrap="square" lIns="0" rIns="0" tIns="0" bIns="0">
+          <a:bodyPr wrap="square" lIns="0" tIns="0" rIns="0" bIns="0">
             <a:spAutoFit/>
           </a:bodyPr>
           <a:lstStyle/>
@@ -4214,6 +4237,7 @@
           <a:lstStyle/>
           <a:p>
             <a:pPr algn="ctr"/>
+            <a:endParaRPr/>
           </a:p>
         </p:txBody>
       </p:sp>
@@ -4234,7 +4258,7 @@
           <a:noFill/>
         </p:spPr>
         <p:txBody>
-          <a:bodyPr wrap="square" lIns="0" rIns="0" tIns="0" bIns="0">
+          <a:bodyPr wrap="square" lIns="0" tIns="0" rIns="0" bIns="0">
             <a:spAutoFit/>
           </a:bodyPr>
           <a:lstStyle/>
@@ -4273,7 +4297,7 @@
           <a:noFill/>
         </p:spPr>
         <p:txBody>
-          <a:bodyPr wrap="square" lIns="0" rIns="0" tIns="0" bIns="0">
+          <a:bodyPr wrap="square" lIns="0" tIns="0" rIns="0" bIns="0">
             <a:spAutoFit/>
           </a:bodyPr>
           <a:lstStyle/>
@@ -4336,6 +4360,7 @@
           <a:lstStyle/>
           <a:p>
             <a:pPr algn="ctr"/>
+            <a:endParaRPr/>
           </a:p>
         </p:txBody>
       </p:sp>
@@ -4356,7 +4381,7 @@
           <a:noFill/>
         </p:spPr>
         <p:txBody>
-          <a:bodyPr wrap="square" lIns="0" rIns="0" tIns="0" bIns="0">
+          <a:bodyPr wrap="square" lIns="0" tIns="0" rIns="0" bIns="0">
             <a:spAutoFit/>
           </a:bodyPr>
           <a:lstStyle/>
@@ -4395,7 +4420,7 @@
           <a:noFill/>
         </p:spPr>
         <p:txBody>
-          <a:bodyPr wrap="square" lIns="0" rIns="0" tIns="0" bIns="0">
+          <a:bodyPr wrap="square" lIns="0" tIns="0" rIns="0" bIns="0">
             <a:spAutoFit/>
           </a:bodyPr>
           <a:lstStyle/>
@@ -4458,6 +4483,7 @@
           <a:lstStyle/>
           <a:p>
             <a:pPr algn="ctr"/>
+            <a:endParaRPr/>
           </a:p>
         </p:txBody>
       </p:sp>
@@ -4478,7 +4504,7 @@
           <a:noFill/>
         </p:spPr>
         <p:txBody>
-          <a:bodyPr wrap="square" lIns="0" rIns="0" tIns="0" bIns="0">
+          <a:bodyPr wrap="square" lIns="0" tIns="0" rIns="0" bIns="0">
             <a:spAutoFit/>
           </a:bodyPr>
           <a:lstStyle/>
@@ -4517,7 +4543,7 @@
           <a:noFill/>
         </p:spPr>
         <p:txBody>
-          <a:bodyPr wrap="square" lIns="0" rIns="0" tIns="0" bIns="0">
+          <a:bodyPr wrap="square" lIns="0" tIns="0" rIns="0" bIns="0">
             <a:spAutoFit/>
           </a:bodyPr>
           <a:lstStyle/>
@@ -4556,7 +4582,7 @@
           <a:noFill/>
         </p:spPr>
         <p:txBody>
-          <a:bodyPr wrap="square" lIns="0" rIns="0" tIns="0" bIns="0">
+          <a:bodyPr wrap="square" lIns="0" tIns="0" rIns="0" bIns="0">
             <a:spAutoFit/>
           </a:bodyPr>
           <a:lstStyle/>
@@ -4619,6 +4645,7 @@
           <a:lstStyle/>
           <a:p>
             <a:pPr algn="ctr"/>
+            <a:endParaRPr/>
           </a:p>
         </p:txBody>
       </p:sp>
@@ -4639,7 +4666,7 @@
           <a:noFill/>
         </p:spPr>
         <p:txBody>
-          <a:bodyPr wrap="square" lIns="0" rIns="0" tIns="0" bIns="0">
+          <a:bodyPr wrap="square" lIns="0" tIns="0" rIns="0" bIns="0">
             <a:spAutoFit/>
           </a:bodyPr>
           <a:lstStyle/>
@@ -4678,7 +4705,7 @@
           <a:noFill/>
         </p:spPr>
         <p:txBody>
-          <a:bodyPr wrap="square" lIns="0" rIns="0" tIns="0" bIns="0">
+          <a:bodyPr wrap="square" lIns="0" tIns="0" rIns="0" bIns="0">
             <a:spAutoFit/>
           </a:bodyPr>
           <a:lstStyle/>
@@ -4717,7 +4744,7 @@
           <a:noFill/>
         </p:spPr>
         <p:txBody>
-          <a:bodyPr wrap="square" lIns="0" rIns="0" tIns="0" bIns="0">
+          <a:bodyPr wrap="square" lIns="0" tIns="0" rIns="0" bIns="0">
             <a:spAutoFit/>
           </a:bodyPr>
           <a:lstStyle/>
@@ -4756,7 +4783,7 @@
           <a:noFill/>
         </p:spPr>
         <p:txBody>
-          <a:bodyPr wrap="square" lIns="0" rIns="0" tIns="0" bIns="0">
+          <a:bodyPr wrap="square" lIns="0" tIns="0" rIns="0" bIns="0">
             <a:spAutoFit/>
           </a:bodyPr>
           <a:lstStyle/>
@@ -4796,7 +4823,7 @@
 </file>
 
 <file path=ppt/slides/slide12.xml><?xml version="1.0" encoding="utf-8"?>
-<p:sld xmlns:a="http://schemas.openxmlformats.org/drawingml/2006/main" xmlns:p="http://schemas.openxmlformats.org/presentationml/2006/main" xmlns:r="http://schemas.openxmlformats.org/officeDocument/2006/relationships">
+<p:sld xmlns:a="http://schemas.openxmlformats.org/drawingml/2006/main" xmlns:r="http://schemas.openxmlformats.org/officeDocument/2006/relationships" xmlns:p="http://schemas.openxmlformats.org/presentationml/2006/main">
   <p:cSld>
     <p:spTree>
       <p:nvGrpSpPr>
@@ -4804,7 +4831,14 @@
         <p:cNvGrpSpPr/>
         <p:nvPr/>
       </p:nvGrpSpPr>
-      <p:grpSpPr/>
+      <p:grpSpPr>
+        <a:xfrm>
+          <a:off x="0" y="0"/>
+          <a:ext cx="0" cy="0"/>
+          <a:chOff x="0" y="0"/>
+          <a:chExt cx="0" cy="0"/>
+        </a:xfrm>
+      </p:grpSpPr>
       <p:sp>
         <p:nvSpPr>
           <p:cNvPr id="2" name="Rectangle 1"/>
@@ -4846,6 +4880,7 @@
           <a:lstStyle/>
           <a:p>
             <a:pPr algn="ctr"/>
+            <a:endParaRPr/>
           </a:p>
         </p:txBody>
       </p:sp>
@@ -4866,7 +4901,7 @@
           <a:noFill/>
         </p:spPr>
         <p:txBody>
-          <a:bodyPr wrap="square" lIns="0" rIns="0" tIns="0" bIns="0">
+          <a:bodyPr wrap="square" lIns="0" tIns="0" rIns="0" bIns="0">
             <a:spAutoFit/>
           </a:bodyPr>
           <a:lstStyle/>
@@ -4905,7 +4940,7 @@
           <a:noFill/>
         </p:spPr>
         <p:txBody>
-          <a:bodyPr wrap="square" lIns="0" rIns="0" tIns="0" bIns="0">
+          <a:bodyPr wrap="square" lIns="0" tIns="0" rIns="0" bIns="0">
             <a:spAutoFit/>
           </a:bodyPr>
           <a:lstStyle/>
@@ -4944,7 +4979,7 @@
           <a:noFill/>
         </p:spPr>
         <p:txBody>
-          <a:bodyPr wrap="square" lIns="0" rIns="0" tIns="0" bIns="0">
+          <a:bodyPr wrap="square" lIns="0" tIns="0" rIns="0" bIns="0">
             <a:spAutoFit/>
           </a:bodyPr>
           <a:lstStyle/>
@@ -4983,7 +5018,7 @@
           <a:noFill/>
         </p:spPr>
         <p:txBody>
-          <a:bodyPr wrap="square" lIns="0" rIns="0" tIns="0" bIns="0">
+          <a:bodyPr wrap="square" lIns="0" tIns="0" rIns="0" bIns="0">
             <a:spAutoFit/>
           </a:bodyPr>
           <a:lstStyle/>
@@ -5046,6 +5081,7 @@
           <a:lstStyle/>
           <a:p>
             <a:pPr algn="ctr"/>
+            <a:endParaRPr/>
           </a:p>
         </p:txBody>
       </p:sp>
@@ -5066,7 +5102,7 @@
           <a:noFill/>
         </p:spPr>
         <p:txBody>
-          <a:bodyPr wrap="square" lIns="0" rIns="0" tIns="0" bIns="0">
+          <a:bodyPr wrap="square" lIns="0" tIns="0" rIns="0" bIns="0">
             <a:spAutoFit/>
           </a:bodyPr>
           <a:lstStyle/>
@@ -5105,7 +5141,7 @@
           <a:noFill/>
         </p:spPr>
         <p:txBody>
-          <a:bodyPr wrap="square" lIns="0" rIns="0" tIns="0" bIns="0">
+          <a:bodyPr wrap="square" lIns="0" tIns="0" rIns="0" bIns="0">
             <a:spAutoFit/>
           </a:bodyPr>
           <a:lstStyle/>
@@ -5122,16 +5158,7 @@
                 </a:solidFill>
                 <a:latin typeface="Segoe UI"/>
               </a:rPr>
-              <a:t>Position Sarsabz as  </a:t>
-            </a:r>
-            <a:r>
-              <a:rPr sz="1900" b="1" i="0">
-                <a:solidFill>
-                  <a:srgbClr val="C8102E"/>
-                </a:solidFill>
-                <a:latin typeface="Segoe UI"/>
-              </a:rPr>
-              <a:t>THE CHAMPION WHO GAVE THE FARMER HIS DAY, AND NOW GIVES HIM HIS VOICE.</a:t>
+              <a:t>Position Sarsabz as  THE CHAMPION WHO GAVE THE FARMER HIS DAY, AND NOW GIVES HIM HIS VOICE.</a:t>
             </a:r>
           </a:p>
         </p:txBody>
@@ -5153,7 +5180,7 @@
           <a:noFill/>
         </p:spPr>
         <p:txBody>
-          <a:bodyPr wrap="square" lIns="0" rIns="0" tIns="0" bIns="0">
+          <a:bodyPr wrap="square" lIns="0" tIns="0" rIns="0" bIns="0">
             <a:spAutoFit/>
           </a:bodyPr>
           <a:lstStyle/>
@@ -5192,7 +5219,7 @@
           <a:noFill/>
         </p:spPr>
         <p:txBody>
-          <a:bodyPr wrap="square" lIns="0" rIns="0" tIns="0" bIns="0">
+          <a:bodyPr wrap="square" lIns="0" tIns="0" rIns="0" bIns="0">
             <a:spAutoFit/>
           </a:bodyPr>
           <a:lstStyle/>
@@ -5314,6 +5341,7 @@
           <a:lstStyle/>
           <a:p>
             <a:pPr algn="ctr"/>
+            <a:endParaRPr/>
           </a:p>
         </p:txBody>
       </p:sp>
@@ -5334,7 +5362,7 @@
           <a:noFill/>
         </p:spPr>
         <p:txBody>
-          <a:bodyPr wrap="square" lIns="0" rIns="0" tIns="0" bIns="0">
+          <a:bodyPr wrap="square" lIns="0" tIns="0" rIns="0" bIns="0">
             <a:spAutoFit/>
           </a:bodyPr>
           <a:lstStyle/>
@@ -5373,7 +5401,7 @@
           <a:noFill/>
         </p:spPr>
         <p:txBody>
-          <a:bodyPr wrap="square" lIns="0" rIns="0" tIns="0" bIns="0">
+          <a:bodyPr wrap="square" lIns="0" tIns="0" rIns="0" bIns="0">
             <a:spAutoFit/>
           </a:bodyPr>
           <a:lstStyle/>
@@ -5488,7 +5516,7 @@
 </file>
 
 <file path=ppt/slides/slide13.xml><?xml version="1.0" encoding="utf-8"?>
-<p:sld xmlns:a="http://schemas.openxmlformats.org/drawingml/2006/main" xmlns:p="http://schemas.openxmlformats.org/presentationml/2006/main" xmlns:r="http://schemas.openxmlformats.org/officeDocument/2006/relationships">
+<p:sld xmlns:a="http://schemas.openxmlformats.org/drawingml/2006/main" xmlns:r="http://schemas.openxmlformats.org/officeDocument/2006/relationships" xmlns:p="http://schemas.openxmlformats.org/presentationml/2006/main">
   <p:cSld>
     <p:spTree>
       <p:nvGrpSpPr>
@@ -5496,7 +5524,14 @@
         <p:cNvGrpSpPr/>
         <p:nvPr/>
       </p:nvGrpSpPr>
-      <p:grpSpPr/>
+      <p:grpSpPr>
+        <a:xfrm>
+          <a:off x="0" y="0"/>
+          <a:ext cx="0" cy="0"/>
+          <a:chOff x="0" y="0"/>
+          <a:chExt cx="0" cy="0"/>
+        </a:xfrm>
+      </p:grpSpPr>
       <p:sp>
         <p:nvSpPr>
           <p:cNvPr id="2" name="Rectangle 1"/>
@@ -5538,6 +5573,7 @@
           <a:lstStyle/>
           <a:p>
             <a:pPr algn="ctr"/>
+            <a:endParaRPr/>
           </a:p>
         </p:txBody>
       </p:sp>
@@ -5558,7 +5594,7 @@
           <a:noFill/>
         </p:spPr>
         <p:txBody>
-          <a:bodyPr wrap="square" lIns="0" rIns="0" tIns="0" bIns="0">
+          <a:bodyPr wrap="square" lIns="0" tIns="0" rIns="0" bIns="0">
             <a:spAutoFit/>
           </a:bodyPr>
           <a:lstStyle/>
@@ -5589,32 +5625,50 @@
         <p:spPr>
           <a:xfrm>
             <a:off x="548640" y="384048"/>
-            <a:ext cx="11064240" cy="457200"/>
-          </a:xfrm>
-          <a:prstGeom prst="rect">
-            <a:avLst/>
-          </a:prstGeom>
-          <a:noFill/>
-        </p:spPr>
-        <p:txBody>
-          <a:bodyPr wrap="square" lIns="0" rIns="0" tIns="0" bIns="0">
-            <a:spAutoFit/>
-          </a:bodyPr>
-          <a:lstStyle/>
-          <a:p>
-            <a:pPr algn="l">
-              <a:spcAft>
-                <a:spcPts val="0"/>
-              </a:spcAft>
-            </a:pPr>
-            <a:r>
-              <a:rPr sz="2200" b="1" i="0">
+            <a:ext cx="11064240" cy="338554"/>
+          </a:xfrm>
+          <a:prstGeom prst="rect">
+            <a:avLst/>
+          </a:prstGeom>
+          <a:noFill/>
+        </p:spPr>
+        <p:txBody>
+          <a:bodyPr wrap="square" lIns="0" tIns="0" rIns="0" bIns="0">
+            <a:spAutoFit/>
+          </a:bodyPr>
+          <a:lstStyle/>
+          <a:p>
+            <a:pPr algn="l">
+              <a:spcAft>
+                <a:spcPts val="0"/>
+              </a:spcAft>
+            </a:pPr>
+            <a:r>
+              <a:rPr sz="2200" b="1" i="0" dirty="0">
                 <a:solidFill>
                   <a:srgbClr val="FFFFFF"/>
                 </a:solidFill>
                 <a:latin typeface="Segoe UI"/>
               </a:rPr>
-              <a:t>What it asks of Fatima, and how it lives in media</a:t>
+              <a:t>What it asks of Fatima</a:t>
+            </a:r>
+            <a:r>
+              <a:rPr lang="en-US" sz="2200" b="1" i="0" dirty="0">
+                <a:solidFill>
+                  <a:srgbClr val="FFFFFF"/>
+                </a:solidFill>
+                <a:latin typeface="Segoe UI"/>
+              </a:rPr>
+              <a:t> Fertilizer</a:t>
+            </a:r>
+            <a:r>
+              <a:rPr sz="2200" b="1" i="0" dirty="0">
+                <a:solidFill>
+                  <a:srgbClr val="FFFFFF"/>
+                </a:solidFill>
+                <a:latin typeface="Segoe UI"/>
+              </a:rPr>
+              <a:t>, and how it lives in media</a:t>
             </a:r>
           </a:p>
         </p:txBody>
@@ -5636,7 +5690,7 @@
           <a:noFill/>
         </p:spPr>
         <p:txBody>
-          <a:bodyPr wrap="square" lIns="0" rIns="0" tIns="0" bIns="0">
+          <a:bodyPr wrap="square" lIns="0" tIns="0" rIns="0" bIns="0">
             <a:spAutoFit/>
           </a:bodyPr>
           <a:lstStyle/>
@@ -5699,6 +5753,7 @@
           <a:lstStyle/>
           <a:p>
             <a:pPr algn="ctr"/>
+            <a:endParaRPr/>
           </a:p>
         </p:txBody>
       </p:sp>
@@ -5719,7 +5774,7 @@
           <a:noFill/>
         </p:spPr>
         <p:txBody>
-          <a:bodyPr wrap="square" lIns="0" rIns="0" tIns="0" bIns="0">
+          <a:bodyPr wrap="square" lIns="0" tIns="0" rIns="0" bIns="0">
             <a:spAutoFit/>
           </a:bodyPr>
           <a:lstStyle/>
@@ -5758,7 +5813,7 @@
           <a:noFill/>
         </p:spPr>
         <p:txBody>
-          <a:bodyPr wrap="square" lIns="0" rIns="0" tIns="0" bIns="0">
+          <a:bodyPr wrap="square" lIns="0" tIns="0" rIns="0" bIns="0">
             <a:spAutoFit/>
           </a:bodyPr>
           <a:lstStyle/>
@@ -5821,6 +5876,7 @@
           <a:lstStyle/>
           <a:p>
             <a:pPr algn="ctr"/>
+            <a:endParaRPr/>
           </a:p>
         </p:txBody>
       </p:sp>
@@ -5841,7 +5897,7 @@
           <a:noFill/>
         </p:spPr>
         <p:txBody>
-          <a:bodyPr wrap="square" lIns="0" rIns="0" tIns="0" bIns="0">
+          <a:bodyPr wrap="square" lIns="0" tIns="0" rIns="0" bIns="0">
             <a:spAutoFit/>
           </a:bodyPr>
           <a:lstStyle/>
@@ -5880,7 +5936,7 @@
           <a:noFill/>
         </p:spPr>
         <p:txBody>
-          <a:bodyPr wrap="square" lIns="0" rIns="0" tIns="0" bIns="0">
+          <a:bodyPr wrap="square" lIns="0" tIns="0" rIns="0" bIns="0">
             <a:spAutoFit/>
           </a:bodyPr>
           <a:lstStyle/>
@@ -5943,6 +5999,7 @@
           <a:lstStyle/>
           <a:p>
             <a:pPr algn="ctr"/>
+            <a:endParaRPr/>
           </a:p>
         </p:txBody>
       </p:sp>
@@ -5963,7 +6020,7 @@
           <a:noFill/>
         </p:spPr>
         <p:txBody>
-          <a:bodyPr wrap="square" lIns="0" rIns="0" tIns="0" bIns="0">
+          <a:bodyPr wrap="square" lIns="0" tIns="0" rIns="0" bIns="0">
             <a:spAutoFit/>
           </a:bodyPr>
           <a:lstStyle/>
@@ -6002,7 +6059,7 @@
           <a:noFill/>
         </p:spPr>
         <p:txBody>
-          <a:bodyPr wrap="square" lIns="0" rIns="0" tIns="0" bIns="0">
+          <a:bodyPr wrap="square" lIns="0" tIns="0" rIns="0" bIns="0">
             <a:spAutoFit/>
           </a:bodyPr>
           <a:lstStyle/>
@@ -6065,6 +6122,7 @@
           <a:lstStyle/>
           <a:p>
             <a:pPr algn="ctr"/>
+            <a:endParaRPr/>
           </a:p>
         </p:txBody>
       </p:sp>
@@ -6085,7 +6143,7 @@
           <a:noFill/>
         </p:spPr>
         <p:txBody>
-          <a:bodyPr wrap="square" lIns="0" rIns="0" tIns="0" bIns="0">
+          <a:bodyPr wrap="square" lIns="0" tIns="0" rIns="0" bIns="0">
             <a:spAutoFit/>
           </a:bodyPr>
           <a:lstStyle/>
@@ -6124,7 +6182,7 @@
           <a:noFill/>
         </p:spPr>
         <p:txBody>
-          <a:bodyPr wrap="square" lIns="0" rIns="0" tIns="0" bIns="0">
+          <a:bodyPr wrap="square" lIns="0" tIns="0" rIns="0" bIns="0">
             <a:spAutoFit/>
           </a:bodyPr>
           <a:lstStyle/>
@@ -6187,6 +6245,7 @@
           <a:lstStyle/>
           <a:p>
             <a:pPr algn="ctr"/>
+            <a:endParaRPr/>
           </a:p>
         </p:txBody>
       </p:sp>
@@ -6207,7 +6266,7 @@
           <a:noFill/>
         </p:spPr>
         <p:txBody>
-          <a:bodyPr wrap="square" lIns="0" rIns="0" tIns="0" bIns="0">
+          <a:bodyPr wrap="square" lIns="0" tIns="0" rIns="0" bIns="0">
             <a:spAutoFit/>
           </a:bodyPr>
           <a:lstStyle/>
@@ -6246,7 +6305,7 @@
           <a:noFill/>
         </p:spPr>
         <p:txBody>
-          <a:bodyPr wrap="square" lIns="0" rIns="0" tIns="0" bIns="0">
+          <a:bodyPr wrap="square" lIns="0" tIns="0" rIns="0" bIns="0">
             <a:spAutoFit/>
           </a:bodyPr>
           <a:lstStyle/>
@@ -6285,7 +6344,7 @@
           <a:noFill/>
         </p:spPr>
         <p:txBody>
-          <a:bodyPr wrap="square" lIns="0" rIns="0" tIns="0" bIns="0">
+          <a:bodyPr wrap="square" lIns="0" tIns="0" rIns="0" bIns="0">
             <a:spAutoFit/>
           </a:bodyPr>
           <a:lstStyle/>
@@ -6324,7 +6383,7 @@
           <a:noFill/>
         </p:spPr>
         <p:txBody>
-          <a:bodyPr wrap="square" lIns="0" rIns="0" tIns="0" bIns="0">
+          <a:bodyPr wrap="square" lIns="0" tIns="0" rIns="0" bIns="0">
             <a:spAutoFit/>
           </a:bodyPr>
           <a:lstStyle/>
@@ -6363,7 +6422,7 @@
           <a:noFill/>
         </p:spPr>
         <p:txBody>
-          <a:bodyPr wrap="square" lIns="0" rIns="0" tIns="0" bIns="0">
+          <a:bodyPr wrap="square" lIns="0" tIns="0" rIns="0" bIns="0">
             <a:spAutoFit/>
           </a:bodyPr>
           <a:lstStyle/>
@@ -6510,6 +6569,7 @@
           <a:lstStyle/>
           <a:p>
             <a:pPr algn="ctr"/>
+            <a:endParaRPr/>
           </a:p>
         </p:txBody>
       </p:sp>
@@ -6530,7 +6590,7 @@
           <a:noFill/>
         </p:spPr>
         <p:txBody>
-          <a:bodyPr wrap="square" lIns="0" rIns="0" tIns="0" bIns="0">
+          <a:bodyPr wrap="square" lIns="0" tIns="0" rIns="0" bIns="0">
             <a:spAutoFit/>
           </a:bodyPr>
           <a:lstStyle/>
@@ -6561,7 +6621,7 @@
 </file>
 
 <file path=ppt/slides/slide14.xml><?xml version="1.0" encoding="utf-8"?>
-<p:sld xmlns:a="http://schemas.openxmlformats.org/drawingml/2006/main" xmlns:p="http://schemas.openxmlformats.org/presentationml/2006/main" xmlns:r="http://schemas.openxmlformats.org/officeDocument/2006/relationships">
+<p:sld xmlns:a="http://schemas.openxmlformats.org/drawingml/2006/main" xmlns:r="http://schemas.openxmlformats.org/officeDocument/2006/relationships" xmlns:p="http://schemas.openxmlformats.org/presentationml/2006/main">
   <p:cSld>
     <p:spTree>
       <p:nvGrpSpPr>
@@ -6569,7 +6629,14 @@
         <p:cNvGrpSpPr/>
         <p:nvPr/>
       </p:nvGrpSpPr>
-      <p:grpSpPr/>
+      <p:grpSpPr>
+        <a:xfrm>
+          <a:off x="0" y="0"/>
+          <a:ext cx="0" cy="0"/>
+          <a:chOff x="0" y="0"/>
+          <a:chExt cx="0" cy="0"/>
+        </a:xfrm>
+      </p:grpSpPr>
       <p:sp>
         <p:nvSpPr>
           <p:cNvPr id="2" name="Rectangle 1"/>
@@ -6611,6 +6678,7 @@
           <a:lstStyle/>
           <a:p>
             <a:pPr algn="ctr"/>
+            <a:endParaRPr/>
           </a:p>
         </p:txBody>
       </p:sp>
@@ -6655,6 +6723,7 @@
           <a:lstStyle/>
           <a:p>
             <a:pPr algn="ctr"/>
+            <a:endParaRPr/>
           </a:p>
         </p:txBody>
       </p:sp>
@@ -6675,7 +6744,7 @@
           <a:noFill/>
         </p:spPr>
         <p:txBody>
-          <a:bodyPr wrap="square" lIns="0" rIns="0" tIns="0" bIns="0">
+          <a:bodyPr wrap="square" lIns="0" tIns="0" rIns="0" bIns="0">
             <a:spAutoFit/>
           </a:bodyPr>
           <a:lstStyle/>
@@ -6714,7 +6783,7 @@
           <a:noFill/>
         </p:spPr>
         <p:txBody>
-          <a:bodyPr wrap="square" lIns="0" rIns="0" tIns="0" bIns="0">
+          <a:bodyPr wrap="square" lIns="0" tIns="0" rIns="0" bIns="0">
             <a:spAutoFit/>
           </a:bodyPr>
           <a:lstStyle/>
@@ -6769,7 +6838,7 @@
           <a:noFill/>
         </p:spPr>
         <p:txBody>
-          <a:bodyPr wrap="square" lIns="0" rIns="0" tIns="0" bIns="0">
+          <a:bodyPr wrap="square" lIns="0" tIns="0" rIns="0" bIns="0">
             <a:spAutoFit/>
           </a:bodyPr>
           <a:lstStyle/>
@@ -6808,7 +6877,7 @@
           <a:noFill/>
         </p:spPr>
         <p:txBody>
-          <a:bodyPr wrap="square" lIns="0" rIns="0" tIns="0" bIns="0">
+          <a:bodyPr wrap="square" lIns="0" tIns="0" rIns="0" bIns="0">
             <a:spAutoFit/>
           </a:bodyPr>
           <a:lstStyle/>
@@ -6839,7 +6908,7 @@
 </file>
 
 <file path=ppt/slides/slide15.xml><?xml version="1.0" encoding="utf-8"?>
-<p:sld xmlns:a="http://schemas.openxmlformats.org/drawingml/2006/main" xmlns:p="http://schemas.openxmlformats.org/presentationml/2006/main" xmlns:r="http://schemas.openxmlformats.org/officeDocument/2006/relationships">
+<p:sld xmlns:a="http://schemas.openxmlformats.org/drawingml/2006/main" xmlns:r="http://schemas.openxmlformats.org/officeDocument/2006/relationships" xmlns:p="http://schemas.openxmlformats.org/presentationml/2006/main">
   <p:cSld>
     <p:spTree>
       <p:nvGrpSpPr>
@@ -6847,7 +6916,14 @@
         <p:cNvGrpSpPr/>
         <p:nvPr/>
       </p:nvGrpSpPr>
-      <p:grpSpPr/>
+      <p:grpSpPr>
+        <a:xfrm>
+          <a:off x="0" y="0"/>
+          <a:ext cx="0" cy="0"/>
+          <a:chOff x="0" y="0"/>
+          <a:chExt cx="0" cy="0"/>
+        </a:xfrm>
+      </p:grpSpPr>
       <p:sp>
         <p:nvSpPr>
           <p:cNvPr id="2" name="Rectangle 1"/>
@@ -6889,6 +6965,7 @@
           <a:lstStyle/>
           <a:p>
             <a:pPr algn="ctr"/>
+            <a:endParaRPr/>
           </a:p>
         </p:txBody>
       </p:sp>
@@ -6909,7 +6986,7 @@
           <a:noFill/>
         </p:spPr>
         <p:txBody>
-          <a:bodyPr wrap="square" lIns="0" rIns="0" tIns="0" bIns="0">
+          <a:bodyPr wrap="square" lIns="0" tIns="0" rIns="0" bIns="0">
             <a:spAutoFit/>
           </a:bodyPr>
           <a:lstStyle/>
@@ -6948,7 +7025,7 @@
           <a:noFill/>
         </p:spPr>
         <p:txBody>
-          <a:bodyPr wrap="square" lIns="0" rIns="0" tIns="0" bIns="0">
+          <a:bodyPr wrap="square" lIns="0" tIns="0" rIns="0" bIns="0">
             <a:spAutoFit/>
           </a:bodyPr>
           <a:lstStyle/>
@@ -7011,6 +7088,7 @@
           <a:lstStyle/>
           <a:p>
             <a:pPr algn="ctr"/>
+            <a:endParaRPr/>
           </a:p>
         </p:txBody>
       </p:sp>
@@ -7031,7 +7109,7 @@
           <a:noFill/>
         </p:spPr>
         <p:txBody>
-          <a:bodyPr wrap="square" lIns="0" rIns="0" tIns="0" bIns="0">
+          <a:bodyPr wrap="square" lIns="0" tIns="0" rIns="0" bIns="0">
             <a:spAutoFit/>
           </a:bodyPr>
           <a:lstStyle/>
@@ -7070,7 +7148,7 @@
           <a:noFill/>
         </p:spPr>
         <p:txBody>
-          <a:bodyPr wrap="square" lIns="0" rIns="0" tIns="0" bIns="0">
+          <a:bodyPr wrap="square" lIns="0" tIns="0" rIns="0" bIns="0">
             <a:spAutoFit/>
           </a:bodyPr>
           <a:lstStyle/>
@@ -7133,6 +7211,7 @@
           <a:lstStyle/>
           <a:p>
             <a:pPr algn="ctr"/>
+            <a:endParaRPr/>
           </a:p>
         </p:txBody>
       </p:sp>
@@ -7153,7 +7232,7 @@
           <a:noFill/>
         </p:spPr>
         <p:txBody>
-          <a:bodyPr wrap="square" lIns="0" rIns="0" tIns="0" bIns="0">
+          <a:bodyPr wrap="square" lIns="0" tIns="0" rIns="0" bIns="0">
             <a:spAutoFit/>
           </a:bodyPr>
           <a:lstStyle/>
@@ -7192,7 +7271,7 @@
           <a:noFill/>
         </p:spPr>
         <p:txBody>
-          <a:bodyPr wrap="square" lIns="0" rIns="0" tIns="0" bIns="0">
+          <a:bodyPr wrap="square" lIns="0" tIns="0" rIns="0" bIns="0">
             <a:spAutoFit/>
           </a:bodyPr>
           <a:lstStyle/>
@@ -7255,6 +7334,7 @@
           <a:lstStyle/>
           <a:p>
             <a:pPr algn="ctr"/>
+            <a:endParaRPr/>
           </a:p>
         </p:txBody>
       </p:sp>
@@ -7275,7 +7355,7 @@
           <a:noFill/>
         </p:spPr>
         <p:txBody>
-          <a:bodyPr wrap="square" lIns="0" rIns="0" tIns="0" bIns="0">
+          <a:bodyPr wrap="square" lIns="0" tIns="0" rIns="0" bIns="0">
             <a:spAutoFit/>
           </a:bodyPr>
           <a:lstStyle/>
@@ -7314,7 +7394,7 @@
           <a:noFill/>
         </p:spPr>
         <p:txBody>
-          <a:bodyPr wrap="square" lIns="0" rIns="0" tIns="0" bIns="0">
+          <a:bodyPr wrap="square" lIns="0" tIns="0" rIns="0" bIns="0">
             <a:spAutoFit/>
           </a:bodyPr>
           <a:lstStyle/>
@@ -7377,6 +7457,7 @@
           <a:lstStyle/>
           <a:p>
             <a:pPr algn="ctr"/>
+            <a:endParaRPr/>
           </a:p>
         </p:txBody>
       </p:sp>
@@ -7397,7 +7478,7 @@
           <a:noFill/>
         </p:spPr>
         <p:txBody>
-          <a:bodyPr wrap="square" lIns="0" rIns="0" tIns="0" bIns="0">
+          <a:bodyPr wrap="square" lIns="0" tIns="0" rIns="0" bIns="0">
             <a:spAutoFit/>
           </a:bodyPr>
           <a:lstStyle/>
@@ -7436,7 +7517,7 @@
           <a:noFill/>
         </p:spPr>
         <p:txBody>
-          <a:bodyPr wrap="square" lIns="0" rIns="0" tIns="0" bIns="0">
+          <a:bodyPr wrap="square" lIns="0" tIns="0" rIns="0" bIns="0">
             <a:spAutoFit/>
           </a:bodyPr>
           <a:lstStyle/>
@@ -7499,6 +7580,7 @@
           <a:lstStyle/>
           <a:p>
             <a:pPr algn="ctr"/>
+            <a:endParaRPr/>
           </a:p>
         </p:txBody>
       </p:sp>
@@ -7519,7 +7601,7 @@
           <a:noFill/>
         </p:spPr>
         <p:txBody>
-          <a:bodyPr wrap="square" lIns="0" rIns="0" tIns="0" bIns="0">
+          <a:bodyPr wrap="square" lIns="0" tIns="0" rIns="0" bIns="0">
             <a:spAutoFit/>
           </a:bodyPr>
           <a:lstStyle/>
@@ -7558,7 +7640,7 @@
           <a:noFill/>
         </p:spPr>
         <p:txBody>
-          <a:bodyPr wrap="square" lIns="0" rIns="0" tIns="0" bIns="0">
+          <a:bodyPr wrap="square" lIns="0" tIns="0" rIns="0" bIns="0">
             <a:spAutoFit/>
           </a:bodyPr>
           <a:lstStyle/>
@@ -7621,6 +7703,7 @@
           <a:lstStyle/>
           <a:p>
             <a:pPr algn="ctr"/>
+            <a:endParaRPr/>
           </a:p>
         </p:txBody>
       </p:sp>
@@ -7665,6 +7748,7 @@
           <a:lstStyle/>
           <a:p>
             <a:pPr algn="ctr"/>
+            <a:endParaRPr/>
           </a:p>
         </p:txBody>
       </p:sp>
@@ -7685,7 +7769,7 @@
           <a:noFill/>
         </p:spPr>
         <p:txBody>
-          <a:bodyPr wrap="square" lIns="0" rIns="0" tIns="0" bIns="0">
+          <a:bodyPr wrap="square" lIns="0" tIns="0" rIns="0" bIns="0">
             <a:spAutoFit/>
           </a:bodyPr>
           <a:lstStyle/>
@@ -7724,7 +7808,7 @@
           <a:noFill/>
         </p:spPr>
         <p:txBody>
-          <a:bodyPr wrap="square" lIns="0" rIns="0" tIns="0" bIns="0">
+          <a:bodyPr wrap="square" lIns="0" tIns="0" rIns="0" bIns="0">
             <a:spAutoFit/>
           </a:bodyPr>
           <a:lstStyle/>
@@ -7787,6 +7871,7 @@
           <a:lstStyle/>
           <a:p>
             <a:pPr algn="ctr"/>
+            <a:endParaRPr/>
           </a:p>
         </p:txBody>
       </p:sp>
@@ -7807,7 +7892,7 @@
           <a:noFill/>
         </p:spPr>
         <p:txBody>
-          <a:bodyPr wrap="square" lIns="0" rIns="0" tIns="0" bIns="0">
+          <a:bodyPr wrap="square" lIns="0" tIns="0" rIns="0" bIns="0">
             <a:spAutoFit/>
           </a:bodyPr>
           <a:lstStyle/>
@@ -7846,7 +7931,7 @@
           <a:noFill/>
         </p:spPr>
         <p:txBody>
-          <a:bodyPr wrap="square" lIns="0" rIns="0" tIns="0" bIns="0">
+          <a:bodyPr wrap="square" lIns="0" tIns="0" rIns="0" bIns="0">
             <a:spAutoFit/>
           </a:bodyPr>
           <a:lstStyle/>
@@ -7877,7 +7962,7 @@
 </file>
 
 <file path=ppt/slides/slide16.xml><?xml version="1.0" encoding="utf-8"?>
-<p:sld xmlns:a="http://schemas.openxmlformats.org/drawingml/2006/main" xmlns:p="http://schemas.openxmlformats.org/presentationml/2006/main" xmlns:r="http://schemas.openxmlformats.org/officeDocument/2006/relationships">
+<p:sld xmlns:a="http://schemas.openxmlformats.org/drawingml/2006/main" xmlns:r="http://schemas.openxmlformats.org/officeDocument/2006/relationships" xmlns:p="http://schemas.openxmlformats.org/presentationml/2006/main">
   <p:cSld>
     <p:spTree>
       <p:nvGrpSpPr>
@@ -7885,7 +7970,14 @@
         <p:cNvGrpSpPr/>
         <p:nvPr/>
       </p:nvGrpSpPr>
-      <p:grpSpPr/>
+      <p:grpSpPr>
+        <a:xfrm>
+          <a:off x="0" y="0"/>
+          <a:ext cx="0" cy="0"/>
+          <a:chOff x="0" y="0"/>
+          <a:chExt cx="0" cy="0"/>
+        </a:xfrm>
+      </p:grpSpPr>
       <p:sp>
         <p:nvSpPr>
           <p:cNvPr id="2" name="Rectangle 1"/>
@@ -7927,6 +8019,7 @@
           <a:lstStyle/>
           <a:p>
             <a:pPr algn="ctr"/>
+            <a:endParaRPr/>
           </a:p>
         </p:txBody>
       </p:sp>
@@ -7947,7 +8040,7 @@
           <a:noFill/>
         </p:spPr>
         <p:txBody>
-          <a:bodyPr wrap="square" lIns="0" rIns="0" tIns="0" bIns="0">
+          <a:bodyPr wrap="square" lIns="0" tIns="0" rIns="0" bIns="0">
             <a:spAutoFit/>
           </a:bodyPr>
           <a:lstStyle/>
@@ -7986,7 +8079,7 @@
           <a:noFill/>
         </p:spPr>
         <p:txBody>
-          <a:bodyPr wrap="square" lIns="0" rIns="0" tIns="0" bIns="0">
+          <a:bodyPr wrap="square" lIns="0" tIns="0" rIns="0" bIns="0">
             <a:spAutoFit/>
           </a:bodyPr>
           <a:lstStyle/>
@@ -8049,6 +8142,7 @@
           <a:lstStyle/>
           <a:p>
             <a:pPr algn="ctr"/>
+            <a:endParaRPr/>
           </a:p>
         </p:txBody>
       </p:sp>
@@ -8069,7 +8163,7 @@
           <a:noFill/>
         </p:spPr>
         <p:txBody>
-          <a:bodyPr wrap="square" lIns="0" rIns="0" tIns="0" bIns="0">
+          <a:bodyPr wrap="square" lIns="0" tIns="0" rIns="0" bIns="0">
             <a:spAutoFit/>
           </a:bodyPr>
           <a:lstStyle/>
@@ -8108,7 +8202,7 @@
           <a:noFill/>
         </p:spPr>
         <p:txBody>
-          <a:bodyPr wrap="square" lIns="0" rIns="0" tIns="0" bIns="0">
+          <a:bodyPr wrap="square" lIns="0" tIns="0" rIns="0" bIns="0">
             <a:spAutoFit/>
           </a:bodyPr>
           <a:lstStyle/>
@@ -8171,6 +8265,7 @@
           <a:lstStyle/>
           <a:p>
             <a:pPr algn="ctr"/>
+            <a:endParaRPr/>
           </a:p>
         </p:txBody>
       </p:sp>
@@ -8191,7 +8286,7 @@
           <a:noFill/>
         </p:spPr>
         <p:txBody>
-          <a:bodyPr wrap="square" lIns="0" rIns="0" tIns="0" bIns="0">
+          <a:bodyPr wrap="square" lIns="0" tIns="0" rIns="0" bIns="0">
             <a:spAutoFit/>
           </a:bodyPr>
           <a:lstStyle/>
@@ -8230,7 +8325,7 @@
           <a:noFill/>
         </p:spPr>
         <p:txBody>
-          <a:bodyPr wrap="square" lIns="0" rIns="0" tIns="0" bIns="0">
+          <a:bodyPr wrap="square" lIns="0" tIns="0" rIns="0" bIns="0">
             <a:spAutoFit/>
           </a:bodyPr>
           <a:lstStyle/>
@@ -8269,7 +8364,7 @@
           <a:noFill/>
         </p:spPr>
         <p:txBody>
-          <a:bodyPr wrap="square" lIns="0" rIns="0" tIns="0" bIns="0">
+          <a:bodyPr wrap="square" lIns="0" tIns="0" rIns="0" bIns="0">
             <a:spAutoFit/>
           </a:bodyPr>
           <a:lstStyle/>
@@ -8308,7 +8403,7 @@
           <a:noFill/>
         </p:spPr>
         <p:txBody>
-          <a:bodyPr wrap="square" lIns="0" rIns="0" tIns="0" bIns="0">
+          <a:bodyPr wrap="square" lIns="0" tIns="0" rIns="0" bIns="0">
             <a:spAutoFit/>
           </a:bodyPr>
           <a:lstStyle/>
@@ -8371,6 +8466,7 @@
           <a:lstStyle/>
           <a:p>
             <a:pPr algn="ctr"/>
+            <a:endParaRPr/>
           </a:p>
         </p:txBody>
       </p:sp>
@@ -8391,7 +8487,7 @@
           <a:noFill/>
         </p:spPr>
         <p:txBody>
-          <a:bodyPr wrap="square" lIns="0" rIns="0" tIns="0" bIns="0">
+          <a:bodyPr wrap="square" lIns="0" tIns="0" rIns="0" bIns="0">
             <a:spAutoFit/>
           </a:bodyPr>
           <a:lstStyle/>
@@ -8430,7 +8526,7 @@
           <a:noFill/>
         </p:spPr>
         <p:txBody>
-          <a:bodyPr wrap="square" lIns="0" rIns="0" tIns="0" bIns="0">
+          <a:bodyPr wrap="square" lIns="0" tIns="0" rIns="0" bIns="0">
             <a:spAutoFit/>
           </a:bodyPr>
           <a:lstStyle/>
@@ -8469,7 +8565,7 @@
           <a:noFill/>
         </p:spPr>
         <p:txBody>
-          <a:bodyPr wrap="square" lIns="0" rIns="0" tIns="0" bIns="0">
+          <a:bodyPr wrap="square" lIns="0" tIns="0" rIns="0" bIns="0">
             <a:spAutoFit/>
           </a:bodyPr>
           <a:lstStyle/>
@@ -8508,7 +8604,7 @@
           <a:noFill/>
         </p:spPr>
         <p:txBody>
-          <a:bodyPr wrap="square" lIns="0" rIns="0" tIns="0" bIns="0">
+          <a:bodyPr wrap="square" lIns="0" tIns="0" rIns="0" bIns="0">
             <a:spAutoFit/>
           </a:bodyPr>
           <a:lstStyle/>
@@ -8571,6 +8667,7 @@
           <a:lstStyle/>
           <a:p>
             <a:pPr algn="ctr"/>
+            <a:endParaRPr/>
           </a:p>
         </p:txBody>
       </p:sp>
@@ -8591,7 +8688,7 @@
           <a:noFill/>
         </p:spPr>
         <p:txBody>
-          <a:bodyPr wrap="square" lIns="0" rIns="0" tIns="0" bIns="0">
+          <a:bodyPr wrap="square" lIns="0" tIns="0" rIns="0" bIns="0">
             <a:spAutoFit/>
           </a:bodyPr>
           <a:lstStyle/>
@@ -8630,7 +8727,7 @@
           <a:noFill/>
         </p:spPr>
         <p:txBody>
-          <a:bodyPr wrap="square" lIns="0" rIns="0" tIns="0" bIns="0">
+          <a:bodyPr wrap="square" lIns="0" tIns="0" rIns="0" bIns="0">
             <a:spAutoFit/>
           </a:bodyPr>
           <a:lstStyle/>
@@ -8661,7 +8758,7 @@
 </file>
 
 <file path=ppt/slides/slide17.xml><?xml version="1.0" encoding="utf-8"?>
-<p:sld xmlns:a="http://schemas.openxmlformats.org/drawingml/2006/main" xmlns:p="http://schemas.openxmlformats.org/presentationml/2006/main" xmlns:r="http://schemas.openxmlformats.org/officeDocument/2006/relationships">
+<p:sld xmlns:a="http://schemas.openxmlformats.org/drawingml/2006/main" xmlns:r="http://schemas.openxmlformats.org/officeDocument/2006/relationships" xmlns:p="http://schemas.openxmlformats.org/presentationml/2006/main">
   <p:cSld>
     <p:spTree>
       <p:nvGrpSpPr>
@@ -8669,7 +8766,14 @@
         <p:cNvGrpSpPr/>
         <p:nvPr/>
       </p:nvGrpSpPr>
-      <p:grpSpPr/>
+      <p:grpSpPr>
+        <a:xfrm>
+          <a:off x="0" y="0"/>
+          <a:ext cx="0" cy="0"/>
+          <a:chOff x="0" y="0"/>
+          <a:chExt cx="0" cy="0"/>
+        </a:xfrm>
+      </p:grpSpPr>
       <p:sp>
         <p:nvSpPr>
           <p:cNvPr id="2" name="Rectangle 1"/>
@@ -8711,6 +8815,7 @@
           <a:lstStyle/>
           <a:p>
             <a:pPr algn="ctr"/>
+            <a:endParaRPr/>
           </a:p>
         </p:txBody>
       </p:sp>
@@ -8731,7 +8836,7 @@
           <a:noFill/>
         </p:spPr>
         <p:txBody>
-          <a:bodyPr wrap="square" lIns="0" rIns="0" tIns="0" bIns="0">
+          <a:bodyPr wrap="square" lIns="0" tIns="0" rIns="0" bIns="0">
             <a:spAutoFit/>
           </a:bodyPr>
           <a:lstStyle/>
@@ -8770,7 +8875,7 @@
           <a:noFill/>
         </p:spPr>
         <p:txBody>
-          <a:bodyPr wrap="square" lIns="0" rIns="0" tIns="0" bIns="0">
+          <a:bodyPr wrap="square" lIns="0" tIns="0" rIns="0" bIns="0">
             <a:spAutoFit/>
           </a:bodyPr>
           <a:lstStyle/>
@@ -8833,6 +8938,7 @@
           <a:lstStyle/>
           <a:p>
             <a:pPr algn="ctr"/>
+            <a:endParaRPr/>
           </a:p>
         </p:txBody>
       </p:sp>
@@ -8853,7 +8959,7 @@
           <a:noFill/>
         </p:spPr>
         <p:txBody>
-          <a:bodyPr wrap="square" lIns="0" rIns="0" tIns="0" bIns="0">
+          <a:bodyPr wrap="square" lIns="0" tIns="0" rIns="0" bIns="0">
             <a:spAutoFit/>
           </a:bodyPr>
           <a:lstStyle/>
@@ -8892,7 +8998,7 @@
           <a:noFill/>
         </p:spPr>
         <p:txBody>
-          <a:bodyPr wrap="square" lIns="0" rIns="0" tIns="0" bIns="0">
+          <a:bodyPr wrap="square" lIns="0" tIns="0" rIns="0" bIns="0">
             <a:spAutoFit/>
           </a:bodyPr>
           <a:lstStyle/>
@@ -8955,6 +9061,7 @@
           <a:lstStyle/>
           <a:p>
             <a:pPr algn="ctr"/>
+            <a:endParaRPr/>
           </a:p>
         </p:txBody>
       </p:sp>
@@ -8975,7 +9082,7 @@
           <a:noFill/>
         </p:spPr>
         <p:txBody>
-          <a:bodyPr wrap="square" lIns="0" rIns="0" tIns="0" bIns="0">
+          <a:bodyPr wrap="square" lIns="0" tIns="0" rIns="0" bIns="0">
             <a:spAutoFit/>
           </a:bodyPr>
           <a:lstStyle/>
@@ -9014,7 +9121,7 @@
           <a:noFill/>
         </p:spPr>
         <p:txBody>
-          <a:bodyPr wrap="square" lIns="0" rIns="0" tIns="0" bIns="0">
+          <a:bodyPr wrap="square" lIns="0" tIns="0" rIns="0" bIns="0">
             <a:spAutoFit/>
           </a:bodyPr>
           <a:lstStyle/>
@@ -9053,7 +9160,7 @@
           <a:noFill/>
         </p:spPr>
         <p:txBody>
-          <a:bodyPr wrap="square" lIns="0" rIns="0" tIns="0" bIns="0">
+          <a:bodyPr wrap="square" lIns="0" tIns="0" rIns="0" bIns="0">
             <a:spAutoFit/>
           </a:bodyPr>
           <a:lstStyle/>
@@ -9092,7 +9199,7 @@
           <a:noFill/>
         </p:spPr>
         <p:txBody>
-          <a:bodyPr wrap="square" lIns="0" rIns="0" tIns="0" bIns="0">
+          <a:bodyPr wrap="square" lIns="0" tIns="0" rIns="0" bIns="0">
             <a:spAutoFit/>
           </a:bodyPr>
           <a:lstStyle/>
@@ -9131,7 +9238,7 @@
           <a:noFill/>
         </p:spPr>
         <p:txBody>
-          <a:bodyPr wrap="square" lIns="0" rIns="0" tIns="0" bIns="0">
+          <a:bodyPr wrap="square" lIns="0" tIns="0" rIns="0" bIns="0">
             <a:spAutoFit/>
           </a:bodyPr>
           <a:lstStyle/>
@@ -9170,7 +9277,7 @@
           <a:noFill/>
         </p:spPr>
         <p:txBody>
-          <a:bodyPr wrap="square" lIns="0" rIns="0" tIns="0" bIns="0">
+          <a:bodyPr wrap="square" lIns="0" tIns="0" rIns="0" bIns="0">
             <a:spAutoFit/>
           </a:bodyPr>
           <a:lstStyle/>
@@ -9209,7 +9316,7 @@
           <a:noFill/>
         </p:spPr>
         <p:txBody>
-          <a:bodyPr wrap="square" lIns="0" rIns="0" tIns="0" bIns="0">
+          <a:bodyPr wrap="square" lIns="0" tIns="0" rIns="0" bIns="0">
             <a:spAutoFit/>
           </a:bodyPr>
           <a:lstStyle/>
@@ -9248,7 +9355,7 @@
           <a:noFill/>
         </p:spPr>
         <p:txBody>
-          <a:bodyPr wrap="square" lIns="0" rIns="0" tIns="0" bIns="0">
+          <a:bodyPr wrap="square" lIns="0" tIns="0" rIns="0" bIns="0">
             <a:spAutoFit/>
           </a:bodyPr>
           <a:lstStyle/>
@@ -9311,6 +9418,7 @@
           <a:lstStyle/>
           <a:p>
             <a:pPr algn="ctr"/>
+            <a:endParaRPr/>
           </a:p>
         </p:txBody>
       </p:sp>
@@ -9331,7 +9439,7 @@
           <a:noFill/>
         </p:spPr>
         <p:txBody>
-          <a:bodyPr wrap="square" lIns="0" rIns="0" tIns="0" bIns="0">
+          <a:bodyPr wrap="square" lIns="0" tIns="0" rIns="0" bIns="0">
             <a:spAutoFit/>
           </a:bodyPr>
           <a:lstStyle/>
@@ -9370,7 +9478,7 @@
           <a:noFill/>
         </p:spPr>
         <p:txBody>
-          <a:bodyPr wrap="square" lIns="0" rIns="0" tIns="0" bIns="0">
+          <a:bodyPr wrap="square" lIns="0" tIns="0" rIns="0" bIns="0">
             <a:spAutoFit/>
           </a:bodyPr>
           <a:lstStyle/>
@@ -9409,7 +9517,7 @@
           <a:noFill/>
         </p:spPr>
         <p:txBody>
-          <a:bodyPr wrap="square" lIns="0" rIns="0" tIns="0" bIns="0">
+          <a:bodyPr wrap="square" lIns="0" tIns="0" rIns="0" bIns="0">
             <a:spAutoFit/>
           </a:bodyPr>
           <a:lstStyle/>
@@ -9448,7 +9556,7 @@
           <a:noFill/>
         </p:spPr>
         <p:txBody>
-          <a:bodyPr wrap="square" lIns="0" rIns="0" tIns="0" bIns="0">
+          <a:bodyPr wrap="square" lIns="0" tIns="0" rIns="0" bIns="0">
             <a:spAutoFit/>
           </a:bodyPr>
           <a:lstStyle/>
@@ -9487,7 +9595,7 @@
           <a:noFill/>
         </p:spPr>
         <p:txBody>
-          <a:bodyPr wrap="square" lIns="0" rIns="0" tIns="0" bIns="0">
+          <a:bodyPr wrap="square" lIns="0" tIns="0" rIns="0" bIns="0">
             <a:spAutoFit/>
           </a:bodyPr>
           <a:lstStyle/>
@@ -9526,7 +9634,7 @@
           <a:noFill/>
         </p:spPr>
         <p:txBody>
-          <a:bodyPr wrap="square" lIns="0" rIns="0" tIns="0" bIns="0">
+          <a:bodyPr wrap="square" lIns="0" tIns="0" rIns="0" bIns="0">
             <a:spAutoFit/>
           </a:bodyPr>
           <a:lstStyle/>
@@ -9565,7 +9673,7 @@
           <a:noFill/>
         </p:spPr>
         <p:txBody>
-          <a:bodyPr wrap="square" lIns="0" rIns="0" tIns="0" bIns="0">
+          <a:bodyPr wrap="square" lIns="0" tIns="0" rIns="0" bIns="0">
             <a:spAutoFit/>
           </a:bodyPr>
           <a:lstStyle/>
@@ -9604,7 +9712,7 @@
           <a:noFill/>
         </p:spPr>
         <p:txBody>
-          <a:bodyPr wrap="square" lIns="0" rIns="0" tIns="0" bIns="0">
+          <a:bodyPr wrap="square" lIns="0" tIns="0" rIns="0" bIns="0">
             <a:spAutoFit/>
           </a:bodyPr>
           <a:lstStyle/>
@@ -9667,6 +9775,7 @@
           <a:lstStyle/>
           <a:p>
             <a:pPr algn="ctr"/>
+            <a:endParaRPr/>
           </a:p>
         </p:txBody>
       </p:sp>
@@ -9687,7 +9796,7 @@
           <a:noFill/>
         </p:spPr>
         <p:txBody>
-          <a:bodyPr wrap="square" lIns="0" rIns="0" tIns="0" bIns="0">
+          <a:bodyPr wrap="square" lIns="0" tIns="0" rIns="0" bIns="0">
             <a:spAutoFit/>
           </a:bodyPr>
           <a:lstStyle/>
@@ -9726,7 +9835,7 @@
           <a:noFill/>
         </p:spPr>
         <p:txBody>
-          <a:bodyPr wrap="square" lIns="0" rIns="0" tIns="0" bIns="0">
+          <a:bodyPr wrap="square" lIns="0" tIns="0" rIns="0" bIns="0">
             <a:spAutoFit/>
           </a:bodyPr>
           <a:lstStyle/>
@@ -9765,7 +9874,7 @@
           <a:noFill/>
         </p:spPr>
         <p:txBody>
-          <a:bodyPr wrap="square" lIns="0" rIns="0" tIns="0" bIns="0">
+          <a:bodyPr wrap="square" lIns="0" tIns="0" rIns="0" bIns="0">
             <a:spAutoFit/>
           </a:bodyPr>
           <a:lstStyle/>
@@ -9804,7 +9913,7 @@
           <a:noFill/>
         </p:spPr>
         <p:txBody>
-          <a:bodyPr wrap="square" lIns="0" rIns="0" tIns="0" bIns="0">
+          <a:bodyPr wrap="square" lIns="0" tIns="0" rIns="0" bIns="0">
             <a:spAutoFit/>
           </a:bodyPr>
           <a:lstStyle/>
@@ -9843,7 +9952,7 @@
           <a:noFill/>
         </p:spPr>
         <p:txBody>
-          <a:bodyPr wrap="square" lIns="0" rIns="0" tIns="0" bIns="0">
+          <a:bodyPr wrap="square" lIns="0" tIns="0" rIns="0" bIns="0">
             <a:spAutoFit/>
           </a:bodyPr>
           <a:lstStyle/>
@@ -9882,7 +9991,7 @@
           <a:noFill/>
         </p:spPr>
         <p:txBody>
-          <a:bodyPr wrap="square" lIns="0" rIns="0" tIns="0" bIns="0">
+          <a:bodyPr wrap="square" lIns="0" tIns="0" rIns="0" bIns="0">
             <a:spAutoFit/>
           </a:bodyPr>
           <a:lstStyle/>
@@ -9921,7 +10030,7 @@
           <a:noFill/>
         </p:spPr>
         <p:txBody>
-          <a:bodyPr wrap="square" lIns="0" rIns="0" tIns="0" bIns="0">
+          <a:bodyPr wrap="square" lIns="0" tIns="0" rIns="0" bIns="0">
             <a:spAutoFit/>
           </a:bodyPr>
           <a:lstStyle/>
@@ -9960,7 +10069,7 @@
           <a:noFill/>
         </p:spPr>
         <p:txBody>
-          <a:bodyPr wrap="square" lIns="0" rIns="0" tIns="0" bIns="0">
+          <a:bodyPr wrap="square" lIns="0" tIns="0" rIns="0" bIns="0">
             <a:spAutoFit/>
           </a:bodyPr>
           <a:lstStyle/>
@@ -10023,6 +10132,7 @@
           <a:lstStyle/>
           <a:p>
             <a:pPr algn="ctr"/>
+            <a:endParaRPr/>
           </a:p>
         </p:txBody>
       </p:sp>
@@ -10043,7 +10153,7 @@
           <a:noFill/>
         </p:spPr>
         <p:txBody>
-          <a:bodyPr wrap="square" lIns="0" rIns="0" tIns="0" bIns="0">
+          <a:bodyPr wrap="square" lIns="0" tIns="0" rIns="0" bIns="0">
             <a:spAutoFit/>
           </a:bodyPr>
           <a:lstStyle/>
@@ -10082,7 +10192,7 @@
           <a:noFill/>
         </p:spPr>
         <p:txBody>
-          <a:bodyPr wrap="square" lIns="0" rIns="0" tIns="0" bIns="0">
+          <a:bodyPr wrap="square" lIns="0" tIns="0" rIns="0" bIns="0">
             <a:spAutoFit/>
           </a:bodyPr>
           <a:lstStyle/>
@@ -10121,7 +10231,7 @@
           <a:noFill/>
         </p:spPr>
         <p:txBody>
-          <a:bodyPr wrap="square" lIns="0" rIns="0" tIns="0" bIns="0">
+          <a:bodyPr wrap="square" lIns="0" tIns="0" rIns="0" bIns="0">
             <a:spAutoFit/>
           </a:bodyPr>
           <a:lstStyle/>
@@ -10160,7 +10270,7 @@
           <a:noFill/>
         </p:spPr>
         <p:txBody>
-          <a:bodyPr wrap="square" lIns="0" rIns="0" tIns="0" bIns="0">
+          <a:bodyPr wrap="square" lIns="0" tIns="0" rIns="0" bIns="0">
             <a:spAutoFit/>
           </a:bodyPr>
           <a:lstStyle/>
@@ -10199,7 +10309,7 @@
           <a:noFill/>
         </p:spPr>
         <p:txBody>
-          <a:bodyPr wrap="square" lIns="0" rIns="0" tIns="0" bIns="0">
+          <a:bodyPr wrap="square" lIns="0" tIns="0" rIns="0" bIns="0">
             <a:spAutoFit/>
           </a:bodyPr>
           <a:lstStyle/>
@@ -10238,7 +10348,7 @@
           <a:noFill/>
         </p:spPr>
         <p:txBody>
-          <a:bodyPr wrap="square" lIns="0" rIns="0" tIns="0" bIns="0">
+          <a:bodyPr wrap="square" lIns="0" tIns="0" rIns="0" bIns="0">
             <a:spAutoFit/>
           </a:bodyPr>
           <a:lstStyle/>
@@ -10277,7 +10387,7 @@
           <a:noFill/>
         </p:spPr>
         <p:txBody>
-          <a:bodyPr wrap="square" lIns="0" rIns="0" tIns="0" bIns="0">
+          <a:bodyPr wrap="square" lIns="0" tIns="0" rIns="0" bIns="0">
             <a:spAutoFit/>
           </a:bodyPr>
           <a:lstStyle/>
@@ -10316,7 +10426,7 @@
           <a:noFill/>
         </p:spPr>
         <p:txBody>
-          <a:bodyPr wrap="square" lIns="0" rIns="0" tIns="0" bIns="0">
+          <a:bodyPr wrap="square" lIns="0" tIns="0" rIns="0" bIns="0">
             <a:spAutoFit/>
           </a:bodyPr>
           <a:lstStyle/>
@@ -10347,7 +10457,7 @@
 </file>
 
 <file path=ppt/slides/slide18.xml><?xml version="1.0" encoding="utf-8"?>
-<p:sld xmlns:a="http://schemas.openxmlformats.org/drawingml/2006/main" xmlns:p="http://schemas.openxmlformats.org/presentationml/2006/main" xmlns:r="http://schemas.openxmlformats.org/officeDocument/2006/relationships">
+<p:sld xmlns:a="http://schemas.openxmlformats.org/drawingml/2006/main" xmlns:r="http://schemas.openxmlformats.org/officeDocument/2006/relationships" xmlns:p="http://schemas.openxmlformats.org/presentationml/2006/main">
   <p:cSld>
     <p:spTree>
       <p:nvGrpSpPr>
@@ -10355,7 +10465,14 @@
         <p:cNvGrpSpPr/>
         <p:nvPr/>
       </p:nvGrpSpPr>
-      <p:grpSpPr/>
+      <p:grpSpPr>
+        <a:xfrm>
+          <a:off x="0" y="0"/>
+          <a:ext cx="0" cy="0"/>
+          <a:chOff x="0" y="0"/>
+          <a:chExt cx="0" cy="0"/>
+        </a:xfrm>
+      </p:grpSpPr>
       <p:sp>
         <p:nvSpPr>
           <p:cNvPr id="2" name="Rectangle 1"/>
@@ -10397,6 +10514,7 @@
           <a:lstStyle/>
           <a:p>
             <a:pPr algn="ctr"/>
+            <a:endParaRPr/>
           </a:p>
         </p:txBody>
       </p:sp>
@@ -10417,7 +10535,7 @@
           <a:noFill/>
         </p:spPr>
         <p:txBody>
-          <a:bodyPr wrap="square" lIns="0" rIns="0" tIns="0" bIns="0">
+          <a:bodyPr wrap="square" lIns="0" tIns="0" rIns="0" bIns="0">
             <a:spAutoFit/>
           </a:bodyPr>
           <a:lstStyle/>
@@ -10456,7 +10574,7 @@
           <a:noFill/>
         </p:spPr>
         <p:txBody>
-          <a:bodyPr wrap="square" lIns="0" rIns="0" tIns="0" bIns="0">
+          <a:bodyPr wrap="square" lIns="0" tIns="0" rIns="0" bIns="0">
             <a:spAutoFit/>
           </a:bodyPr>
           <a:lstStyle/>
@@ -10519,6 +10637,7 @@
           <a:lstStyle/>
           <a:p>
             <a:pPr algn="ctr"/>
+            <a:endParaRPr/>
           </a:p>
         </p:txBody>
       </p:sp>
@@ -10539,7 +10658,7 @@
           <a:noFill/>
         </p:spPr>
         <p:txBody>
-          <a:bodyPr wrap="square" lIns="0" rIns="0" tIns="0" bIns="0">
+          <a:bodyPr wrap="square" lIns="0" tIns="0" rIns="0" bIns="0">
             <a:spAutoFit/>
           </a:bodyPr>
           <a:lstStyle/>
@@ -10578,7 +10697,7 @@
           <a:noFill/>
         </p:spPr>
         <p:txBody>
-          <a:bodyPr wrap="square" lIns="0" rIns="0" tIns="0" bIns="0">
+          <a:bodyPr wrap="square" lIns="0" tIns="0" rIns="0" bIns="0">
             <a:spAutoFit/>
           </a:bodyPr>
           <a:lstStyle/>
@@ -10641,6 +10760,7 @@
           <a:lstStyle/>
           <a:p>
             <a:pPr algn="ctr"/>
+            <a:endParaRPr/>
           </a:p>
         </p:txBody>
       </p:sp>
@@ -10661,7 +10781,7 @@
           <a:noFill/>
         </p:spPr>
         <p:txBody>
-          <a:bodyPr wrap="square" lIns="0" rIns="0" tIns="0" bIns="0">
+          <a:bodyPr wrap="square" lIns="0" tIns="0" rIns="0" bIns="0">
             <a:spAutoFit/>
           </a:bodyPr>
           <a:lstStyle/>
@@ -10700,7 +10820,7 @@
           <a:noFill/>
         </p:spPr>
         <p:txBody>
-          <a:bodyPr wrap="square" lIns="0" rIns="0" tIns="0" bIns="0">
+          <a:bodyPr wrap="square" lIns="0" tIns="0" rIns="0" bIns="0">
             <a:spAutoFit/>
           </a:bodyPr>
           <a:lstStyle/>
@@ -10739,7 +10859,7 @@
           <a:noFill/>
         </p:spPr>
         <p:txBody>
-          <a:bodyPr wrap="square" lIns="0" rIns="0" tIns="0" bIns="0">
+          <a:bodyPr wrap="square" lIns="0" tIns="0" rIns="0" bIns="0">
             <a:spAutoFit/>
           </a:bodyPr>
           <a:lstStyle/>
@@ -10778,7 +10898,7 @@
           <a:noFill/>
         </p:spPr>
         <p:txBody>
-          <a:bodyPr wrap="square" lIns="0" rIns="0" tIns="0" bIns="0">
+          <a:bodyPr wrap="square" lIns="0" tIns="0" rIns="0" bIns="0">
             <a:spAutoFit/>
           </a:bodyPr>
           <a:lstStyle/>
@@ -10817,7 +10937,7 @@
           <a:noFill/>
         </p:spPr>
         <p:txBody>
-          <a:bodyPr wrap="square" lIns="0" rIns="0" tIns="0" bIns="0">
+          <a:bodyPr wrap="square" lIns="0" tIns="0" rIns="0" bIns="0">
             <a:spAutoFit/>
           </a:bodyPr>
           <a:lstStyle/>
@@ -10856,7 +10976,7 @@
           <a:noFill/>
         </p:spPr>
         <p:txBody>
-          <a:bodyPr wrap="square" lIns="0" rIns="0" tIns="0" bIns="0">
+          <a:bodyPr wrap="square" lIns="0" tIns="0" rIns="0" bIns="0">
             <a:spAutoFit/>
           </a:bodyPr>
           <a:lstStyle/>
@@ -10919,6 +11039,7 @@
           <a:lstStyle/>
           <a:p>
             <a:pPr algn="ctr"/>
+            <a:endParaRPr/>
           </a:p>
         </p:txBody>
       </p:sp>
@@ -10939,7 +11060,7 @@
           <a:noFill/>
         </p:spPr>
         <p:txBody>
-          <a:bodyPr wrap="square" lIns="0" rIns="0" tIns="0" bIns="0">
+          <a:bodyPr wrap="square" lIns="0" tIns="0" rIns="0" bIns="0">
             <a:spAutoFit/>
           </a:bodyPr>
           <a:lstStyle/>
@@ -10978,7 +11099,7 @@
           <a:noFill/>
         </p:spPr>
         <p:txBody>
-          <a:bodyPr wrap="square" lIns="0" rIns="0" tIns="0" bIns="0">
+          <a:bodyPr wrap="square" lIns="0" tIns="0" rIns="0" bIns="0">
             <a:spAutoFit/>
           </a:bodyPr>
           <a:lstStyle/>
@@ -11017,7 +11138,7 @@
           <a:noFill/>
         </p:spPr>
         <p:txBody>
-          <a:bodyPr wrap="square" lIns="0" rIns="0" tIns="0" bIns="0">
+          <a:bodyPr wrap="square" lIns="0" tIns="0" rIns="0" bIns="0">
             <a:spAutoFit/>
           </a:bodyPr>
           <a:lstStyle/>
@@ -11056,7 +11177,7 @@
           <a:noFill/>
         </p:spPr>
         <p:txBody>
-          <a:bodyPr wrap="square" lIns="0" rIns="0" tIns="0" bIns="0">
+          <a:bodyPr wrap="square" lIns="0" tIns="0" rIns="0" bIns="0">
             <a:spAutoFit/>
           </a:bodyPr>
           <a:lstStyle/>
@@ -11095,7 +11216,7 @@
           <a:noFill/>
         </p:spPr>
         <p:txBody>
-          <a:bodyPr wrap="square" lIns="0" rIns="0" tIns="0" bIns="0">
+          <a:bodyPr wrap="square" lIns="0" tIns="0" rIns="0" bIns="0">
             <a:spAutoFit/>
           </a:bodyPr>
           <a:lstStyle/>
@@ -11134,7 +11255,7 @@
           <a:noFill/>
         </p:spPr>
         <p:txBody>
-          <a:bodyPr wrap="square" lIns="0" rIns="0" tIns="0" bIns="0">
+          <a:bodyPr wrap="square" lIns="0" tIns="0" rIns="0" bIns="0">
             <a:spAutoFit/>
           </a:bodyPr>
           <a:lstStyle/>
@@ -11165,7 +11286,7 @@
 </file>
 
 <file path=ppt/slides/slide19.xml><?xml version="1.0" encoding="utf-8"?>
-<p:sld xmlns:a="http://schemas.openxmlformats.org/drawingml/2006/main" xmlns:p="http://schemas.openxmlformats.org/presentationml/2006/main" xmlns:r="http://schemas.openxmlformats.org/officeDocument/2006/relationships">
+<p:sld xmlns:a="http://schemas.openxmlformats.org/drawingml/2006/main" xmlns:r="http://schemas.openxmlformats.org/officeDocument/2006/relationships" xmlns:p="http://schemas.openxmlformats.org/presentationml/2006/main">
   <p:cSld>
     <p:spTree>
       <p:nvGrpSpPr>
@@ -11173,7 +11294,14 @@
         <p:cNvGrpSpPr/>
         <p:nvPr/>
       </p:nvGrpSpPr>
-      <p:grpSpPr/>
+      <p:grpSpPr>
+        <a:xfrm>
+          <a:off x="0" y="0"/>
+          <a:ext cx="0" cy="0"/>
+          <a:chOff x="0" y="0"/>
+          <a:chExt cx="0" cy="0"/>
+        </a:xfrm>
+      </p:grpSpPr>
       <p:sp>
         <p:nvSpPr>
           <p:cNvPr id="2" name="Rectangle 1"/>
@@ -11215,6 +11343,7 @@
           <a:lstStyle/>
           <a:p>
             <a:pPr algn="ctr"/>
+            <a:endParaRPr/>
           </a:p>
         </p:txBody>
       </p:sp>
@@ -11235,7 +11364,7 @@
           <a:noFill/>
         </p:spPr>
         <p:txBody>
-          <a:bodyPr wrap="square" lIns="0" rIns="0" tIns="0" bIns="0">
+          <a:bodyPr wrap="square" lIns="0" tIns="0" rIns="0" bIns="0">
             <a:spAutoFit/>
           </a:bodyPr>
           <a:lstStyle/>
@@ -11274,7 +11403,7 @@
           <a:noFill/>
         </p:spPr>
         <p:txBody>
-          <a:bodyPr wrap="square" lIns="0" rIns="0" tIns="0" bIns="0">
+          <a:bodyPr wrap="square" lIns="0" tIns="0" rIns="0" bIns="0">
             <a:spAutoFit/>
           </a:bodyPr>
           <a:lstStyle/>
@@ -11337,6 +11466,7 @@
           <a:lstStyle/>
           <a:p>
             <a:pPr algn="ctr"/>
+            <a:endParaRPr/>
           </a:p>
         </p:txBody>
       </p:sp>
@@ -11357,7 +11487,7 @@
           <a:noFill/>
         </p:spPr>
         <p:txBody>
-          <a:bodyPr wrap="square" lIns="0" rIns="0" tIns="0" bIns="0">
+          <a:bodyPr wrap="square" lIns="0" tIns="0" rIns="0" bIns="0">
             <a:spAutoFit/>
           </a:bodyPr>
           <a:lstStyle/>
@@ -11396,7 +11526,7 @@
           <a:noFill/>
         </p:spPr>
         <p:txBody>
-          <a:bodyPr wrap="square" lIns="0" rIns="0" tIns="0" bIns="0">
+          <a:bodyPr wrap="square" lIns="0" tIns="0" rIns="0" bIns="0">
             <a:spAutoFit/>
           </a:bodyPr>
           <a:lstStyle/>
@@ -11459,6 +11589,7 @@
           <a:lstStyle/>
           <a:p>
             <a:pPr algn="ctr"/>
+            <a:endParaRPr/>
           </a:p>
         </p:txBody>
       </p:sp>
@@ -11479,7 +11610,7 @@
           <a:noFill/>
         </p:spPr>
         <p:txBody>
-          <a:bodyPr wrap="square" lIns="0" rIns="0" tIns="0" bIns="0">
+          <a:bodyPr wrap="square" lIns="0" tIns="0" rIns="0" bIns="0">
             <a:spAutoFit/>
           </a:bodyPr>
           <a:lstStyle/>
@@ -11518,7 +11649,7 @@
           <a:noFill/>
         </p:spPr>
         <p:txBody>
-          <a:bodyPr wrap="square" lIns="0" rIns="0" tIns="0" bIns="0">
+          <a:bodyPr wrap="square" lIns="0" tIns="0" rIns="0" bIns="0">
             <a:spAutoFit/>
           </a:bodyPr>
           <a:lstStyle/>
@@ -11557,7 +11688,7 @@
           <a:noFill/>
         </p:spPr>
         <p:txBody>
-          <a:bodyPr wrap="square" lIns="0" rIns="0" tIns="0" bIns="0">
+          <a:bodyPr wrap="square" lIns="0" tIns="0" rIns="0" bIns="0">
             <a:spAutoFit/>
           </a:bodyPr>
           <a:lstStyle/>
@@ -11596,7 +11727,7 @@
           <a:noFill/>
         </p:spPr>
         <p:txBody>
-          <a:bodyPr wrap="square" lIns="0" rIns="0" tIns="0" bIns="0">
+          <a:bodyPr wrap="square" lIns="0" tIns="0" rIns="0" bIns="0">
             <a:spAutoFit/>
           </a:bodyPr>
           <a:lstStyle/>
@@ -11635,7 +11766,7 @@
           <a:noFill/>
         </p:spPr>
         <p:txBody>
-          <a:bodyPr wrap="square" lIns="0" rIns="0" tIns="0" bIns="0">
+          <a:bodyPr wrap="square" lIns="0" tIns="0" rIns="0" bIns="0">
             <a:spAutoFit/>
           </a:bodyPr>
           <a:lstStyle/>
@@ -11674,7 +11805,7 @@
           <a:noFill/>
         </p:spPr>
         <p:txBody>
-          <a:bodyPr wrap="square" lIns="0" rIns="0" tIns="0" bIns="0">
+          <a:bodyPr wrap="square" lIns="0" tIns="0" rIns="0" bIns="0">
             <a:spAutoFit/>
           </a:bodyPr>
           <a:lstStyle/>
@@ -11737,6 +11868,7 @@
           <a:lstStyle/>
           <a:p>
             <a:pPr algn="ctr"/>
+            <a:endParaRPr/>
           </a:p>
         </p:txBody>
       </p:sp>
@@ -11757,7 +11889,7 @@
           <a:noFill/>
         </p:spPr>
         <p:txBody>
-          <a:bodyPr wrap="square" lIns="0" rIns="0" tIns="0" bIns="0">
+          <a:bodyPr wrap="square" lIns="0" tIns="0" rIns="0" bIns="0">
             <a:spAutoFit/>
           </a:bodyPr>
           <a:lstStyle/>
@@ -11796,7 +11928,7 @@
           <a:noFill/>
         </p:spPr>
         <p:txBody>
-          <a:bodyPr wrap="square" lIns="0" rIns="0" tIns="0" bIns="0">
+          <a:bodyPr wrap="square" lIns="0" tIns="0" rIns="0" bIns="0">
             <a:spAutoFit/>
           </a:bodyPr>
           <a:lstStyle/>
@@ -11835,7 +11967,7 @@
           <a:noFill/>
         </p:spPr>
         <p:txBody>
-          <a:bodyPr wrap="square" lIns="0" rIns="0" tIns="0" bIns="0">
+          <a:bodyPr wrap="square" lIns="0" tIns="0" rIns="0" bIns="0">
             <a:spAutoFit/>
           </a:bodyPr>
           <a:lstStyle/>
@@ -11874,7 +12006,7 @@
           <a:noFill/>
         </p:spPr>
         <p:txBody>
-          <a:bodyPr wrap="square" lIns="0" rIns="0" tIns="0" bIns="0">
+          <a:bodyPr wrap="square" lIns="0" tIns="0" rIns="0" bIns="0">
             <a:spAutoFit/>
           </a:bodyPr>
           <a:lstStyle/>
@@ -11913,7 +12045,7 @@
           <a:noFill/>
         </p:spPr>
         <p:txBody>
-          <a:bodyPr wrap="square" lIns="0" rIns="0" tIns="0" bIns="0">
+          <a:bodyPr wrap="square" lIns="0" tIns="0" rIns="0" bIns="0">
             <a:spAutoFit/>
           </a:bodyPr>
           <a:lstStyle/>
@@ -11952,7 +12084,7 @@
           <a:noFill/>
         </p:spPr>
         <p:txBody>
-          <a:bodyPr wrap="square" lIns="0" rIns="0" tIns="0" bIns="0">
+          <a:bodyPr wrap="square" lIns="0" tIns="0" rIns="0" bIns="0">
             <a:spAutoFit/>
           </a:bodyPr>
           <a:lstStyle/>
@@ -12015,6 +12147,7 @@
           <a:lstStyle/>
           <a:p>
             <a:pPr algn="ctr"/>
+            <a:endParaRPr/>
           </a:p>
         </p:txBody>
       </p:sp>
@@ -12035,7 +12168,7 @@
           <a:noFill/>
         </p:spPr>
         <p:txBody>
-          <a:bodyPr wrap="square" lIns="0" rIns="0" tIns="0" bIns="0">
+          <a:bodyPr wrap="square" lIns="0" tIns="0" rIns="0" bIns="0">
             <a:spAutoFit/>
           </a:bodyPr>
           <a:lstStyle/>
@@ -12074,7 +12207,7 @@
           <a:noFill/>
         </p:spPr>
         <p:txBody>
-          <a:bodyPr wrap="square" lIns="0" rIns="0" tIns="0" bIns="0">
+          <a:bodyPr wrap="square" lIns="0" tIns="0" rIns="0" bIns="0">
             <a:spAutoFit/>
           </a:bodyPr>
           <a:lstStyle/>
@@ -12113,7 +12246,7 @@
           <a:noFill/>
         </p:spPr>
         <p:txBody>
-          <a:bodyPr wrap="square" lIns="0" rIns="0" tIns="0" bIns="0">
+          <a:bodyPr wrap="square" lIns="0" tIns="0" rIns="0" bIns="0">
             <a:spAutoFit/>
           </a:bodyPr>
           <a:lstStyle/>
@@ -12152,7 +12285,7 @@
           <a:noFill/>
         </p:spPr>
         <p:txBody>
-          <a:bodyPr wrap="square" lIns="0" rIns="0" tIns="0" bIns="0">
+          <a:bodyPr wrap="square" lIns="0" tIns="0" rIns="0" bIns="0">
             <a:spAutoFit/>
           </a:bodyPr>
           <a:lstStyle/>
@@ -12191,7 +12324,7 @@
           <a:noFill/>
         </p:spPr>
         <p:txBody>
-          <a:bodyPr wrap="square" lIns="0" rIns="0" tIns="0" bIns="0">
+          <a:bodyPr wrap="square" lIns="0" tIns="0" rIns="0" bIns="0">
             <a:spAutoFit/>
           </a:bodyPr>
           <a:lstStyle/>
@@ -12230,7 +12363,7 @@
           <a:noFill/>
         </p:spPr>
         <p:txBody>
-          <a:bodyPr wrap="square" lIns="0" rIns="0" tIns="0" bIns="0">
+          <a:bodyPr wrap="square" lIns="0" tIns="0" rIns="0" bIns="0">
             <a:spAutoFit/>
           </a:bodyPr>
           <a:lstStyle/>
@@ -12261,7 +12394,7 @@
 </file>
 
 <file path=ppt/slides/slide2.xml><?xml version="1.0" encoding="utf-8"?>
-<p:sld xmlns:a="http://schemas.openxmlformats.org/drawingml/2006/main" xmlns:p="http://schemas.openxmlformats.org/presentationml/2006/main" xmlns:r="http://schemas.openxmlformats.org/officeDocument/2006/relationships">
+<p:sld xmlns:a="http://schemas.openxmlformats.org/drawingml/2006/main" xmlns:r="http://schemas.openxmlformats.org/officeDocument/2006/relationships" xmlns:p="http://schemas.openxmlformats.org/presentationml/2006/main">
   <p:cSld>
     <p:spTree>
       <p:nvGrpSpPr>
@@ -12269,7 +12402,14 @@
         <p:cNvGrpSpPr/>
         <p:nvPr/>
       </p:nvGrpSpPr>
-      <p:grpSpPr/>
+      <p:grpSpPr>
+        <a:xfrm>
+          <a:off x="0" y="0"/>
+          <a:ext cx="0" cy="0"/>
+          <a:chOff x="0" y="0"/>
+          <a:chExt cx="0" cy="0"/>
+        </a:xfrm>
+      </p:grpSpPr>
       <p:sp>
         <p:nvSpPr>
           <p:cNvPr id="2" name="Rectangle 1"/>
@@ -12311,6 +12451,7 @@
           <a:lstStyle/>
           <a:p>
             <a:pPr algn="ctr"/>
+            <a:endParaRPr/>
           </a:p>
         </p:txBody>
       </p:sp>
@@ -12331,7 +12472,7 @@
           <a:noFill/>
         </p:spPr>
         <p:txBody>
-          <a:bodyPr wrap="square" lIns="0" rIns="0" tIns="0" bIns="0">
+          <a:bodyPr wrap="square" lIns="0" tIns="0" rIns="0" bIns="0">
             <a:spAutoFit/>
           </a:bodyPr>
           <a:lstStyle/>
@@ -12370,7 +12511,7 @@
           <a:noFill/>
         </p:spPr>
         <p:txBody>
-          <a:bodyPr wrap="square" lIns="0" rIns="0" tIns="0" bIns="0">
+          <a:bodyPr wrap="square" lIns="0" tIns="0" rIns="0" bIns="0">
             <a:spAutoFit/>
           </a:bodyPr>
           <a:lstStyle/>
@@ -12433,6 +12574,7 @@
           <a:lstStyle/>
           <a:p>
             <a:pPr algn="ctr"/>
+            <a:endParaRPr/>
           </a:p>
         </p:txBody>
       </p:sp>
@@ -12453,7 +12595,7 @@
           <a:noFill/>
         </p:spPr>
         <p:txBody>
-          <a:bodyPr wrap="square" lIns="0" rIns="0" tIns="0" bIns="0">
+          <a:bodyPr wrap="square" lIns="0" tIns="0" rIns="0" bIns="0">
             <a:spAutoFit/>
           </a:bodyPr>
           <a:lstStyle/>
@@ -12492,7 +12634,7 @@
           <a:noFill/>
         </p:spPr>
         <p:txBody>
-          <a:bodyPr wrap="square" lIns="0" rIns="0" tIns="0" bIns="0">
+          <a:bodyPr wrap="square" lIns="0" tIns="0" rIns="0" bIns="0">
             <a:spAutoFit/>
           </a:bodyPr>
           <a:lstStyle/>
@@ -12531,7 +12673,7 @@
           <a:noFill/>
         </p:spPr>
         <p:txBody>
-          <a:bodyPr wrap="square" lIns="0" rIns="0" tIns="0" bIns="0">
+          <a:bodyPr wrap="square" lIns="0" tIns="0" rIns="0" bIns="0">
             <a:spAutoFit/>
           </a:bodyPr>
           <a:lstStyle/>
@@ -12570,7 +12712,7 @@
           <a:noFill/>
         </p:spPr>
         <p:txBody>
-          <a:bodyPr wrap="square" lIns="0" rIns="0" tIns="0" bIns="0">
+          <a:bodyPr wrap="square" lIns="0" tIns="0" rIns="0" bIns="0">
             <a:spAutoFit/>
           </a:bodyPr>
           <a:lstStyle/>
@@ -12657,7 +12799,7 @@
           <a:noFill/>
         </p:spPr>
         <p:txBody>
-          <a:bodyPr wrap="square" lIns="0" rIns="0" tIns="0" bIns="0">
+          <a:bodyPr wrap="square" lIns="0" tIns="0" rIns="0" bIns="0">
             <a:spAutoFit/>
           </a:bodyPr>
           <a:lstStyle/>
@@ -12696,7 +12838,7 @@
           <a:noFill/>
         </p:spPr>
         <p:txBody>
-          <a:bodyPr wrap="square" lIns="0" rIns="0" tIns="0" bIns="0">
+          <a:bodyPr wrap="square" lIns="0" tIns="0" rIns="0" bIns="0">
             <a:spAutoFit/>
           </a:bodyPr>
           <a:lstStyle/>
@@ -12791,6 +12933,7 @@
           <a:lstStyle/>
           <a:p>
             <a:pPr algn="ctr"/>
+            <a:endParaRPr/>
           </a:p>
         </p:txBody>
       </p:sp>
@@ -12835,6 +12978,7 @@
           <a:lstStyle/>
           <a:p>
             <a:pPr algn="ctr"/>
+            <a:endParaRPr/>
           </a:p>
         </p:txBody>
       </p:sp>
@@ -12855,7 +12999,7 @@
           <a:noFill/>
         </p:spPr>
         <p:txBody>
-          <a:bodyPr wrap="square" lIns="0" rIns="0" tIns="0" bIns="0">
+          <a:bodyPr wrap="square" lIns="0" tIns="0" rIns="0" bIns="0">
             <a:spAutoFit/>
           </a:bodyPr>
           <a:lstStyle/>
@@ -12894,7 +13038,7 @@
           <a:noFill/>
         </p:spPr>
         <p:txBody>
-          <a:bodyPr wrap="square" lIns="0" rIns="0" tIns="0" bIns="0">
+          <a:bodyPr wrap="square" lIns="0" tIns="0" rIns="0" bIns="0">
             <a:spAutoFit/>
           </a:bodyPr>
           <a:lstStyle/>
@@ -12941,7 +13085,7 @@
 </file>
 
 <file path=ppt/slides/slide20.xml><?xml version="1.0" encoding="utf-8"?>
-<p:sld xmlns:a="http://schemas.openxmlformats.org/drawingml/2006/main" xmlns:p="http://schemas.openxmlformats.org/presentationml/2006/main" xmlns:r="http://schemas.openxmlformats.org/officeDocument/2006/relationships">
+<p:sld xmlns:a="http://schemas.openxmlformats.org/drawingml/2006/main" xmlns:r="http://schemas.openxmlformats.org/officeDocument/2006/relationships" xmlns:p="http://schemas.openxmlformats.org/presentationml/2006/main">
   <p:cSld>
     <p:spTree>
       <p:nvGrpSpPr>
@@ -12949,7 +13093,14 @@
         <p:cNvGrpSpPr/>
         <p:nvPr/>
       </p:nvGrpSpPr>
-      <p:grpSpPr/>
+      <p:grpSpPr>
+        <a:xfrm>
+          <a:off x="0" y="0"/>
+          <a:ext cx="0" cy="0"/>
+          <a:chOff x="0" y="0"/>
+          <a:chExt cx="0" cy="0"/>
+        </a:xfrm>
+      </p:grpSpPr>
       <p:sp>
         <p:nvSpPr>
           <p:cNvPr id="2" name="Rectangle 1"/>
@@ -12991,6 +13142,7 @@
           <a:lstStyle/>
           <a:p>
             <a:pPr algn="ctr"/>
+            <a:endParaRPr/>
           </a:p>
         </p:txBody>
       </p:sp>
@@ -13011,7 +13163,7 @@
           <a:noFill/>
         </p:spPr>
         <p:txBody>
-          <a:bodyPr wrap="square" lIns="0" rIns="0" tIns="0" bIns="0">
+          <a:bodyPr wrap="square" lIns="0" tIns="0" rIns="0" bIns="0">
             <a:spAutoFit/>
           </a:bodyPr>
           <a:lstStyle/>
@@ -13050,7 +13202,7 @@
           <a:noFill/>
         </p:spPr>
         <p:txBody>
-          <a:bodyPr wrap="square" lIns="0" rIns="0" tIns="0" bIns="0">
+          <a:bodyPr wrap="square" lIns="0" tIns="0" rIns="0" bIns="0">
             <a:spAutoFit/>
           </a:bodyPr>
           <a:lstStyle/>
@@ -13113,6 +13265,7 @@
           <a:lstStyle/>
           <a:p>
             <a:pPr algn="ctr"/>
+            <a:endParaRPr/>
           </a:p>
         </p:txBody>
       </p:sp>
@@ -13133,7 +13286,7 @@
           <a:noFill/>
         </p:spPr>
         <p:txBody>
-          <a:bodyPr wrap="square" lIns="0" rIns="0" tIns="0" bIns="0">
+          <a:bodyPr wrap="square" lIns="0" tIns="0" rIns="0" bIns="0">
             <a:spAutoFit/>
           </a:bodyPr>
           <a:lstStyle/>
@@ -13172,7 +13325,7 @@
           <a:noFill/>
         </p:spPr>
         <p:txBody>
-          <a:bodyPr wrap="square" lIns="0" rIns="0" tIns="0" bIns="0">
+          <a:bodyPr wrap="square" lIns="0" tIns="0" rIns="0" bIns="0">
             <a:spAutoFit/>
           </a:bodyPr>
           <a:lstStyle/>
@@ -13235,6 +13388,7 @@
           <a:lstStyle/>
           <a:p>
             <a:pPr algn="ctr"/>
+            <a:endParaRPr/>
           </a:p>
         </p:txBody>
       </p:sp>
@@ -13279,6 +13433,7 @@
           <a:lstStyle/>
           <a:p>
             <a:pPr algn="ctr"/>
+            <a:endParaRPr/>
           </a:p>
         </p:txBody>
       </p:sp>
@@ -13299,7 +13454,7 @@
           <a:noFill/>
         </p:spPr>
         <p:txBody>
-          <a:bodyPr wrap="square" lIns="0" rIns="0" tIns="0" bIns="0">
+          <a:bodyPr wrap="square" lIns="0" tIns="0" rIns="0" bIns="0">
             <a:spAutoFit/>
           </a:bodyPr>
           <a:lstStyle/>
@@ -13338,7 +13493,7 @@
           <a:noFill/>
         </p:spPr>
         <p:txBody>
-          <a:bodyPr wrap="square" lIns="0" rIns="0" tIns="0" bIns="0">
+          <a:bodyPr wrap="square" lIns="0" tIns="0" rIns="0" bIns="0">
             <a:spAutoFit/>
           </a:bodyPr>
           <a:lstStyle/>
@@ -13449,6 +13604,7 @@
           <a:lstStyle/>
           <a:p>
             <a:pPr algn="ctr"/>
+            <a:endParaRPr/>
           </a:p>
         </p:txBody>
       </p:sp>
@@ -13493,6 +13649,7 @@
           <a:lstStyle/>
           <a:p>
             <a:pPr algn="ctr"/>
+            <a:endParaRPr/>
           </a:p>
         </p:txBody>
       </p:sp>
@@ -13513,7 +13670,7 @@
           <a:noFill/>
         </p:spPr>
         <p:txBody>
-          <a:bodyPr wrap="square" lIns="0" rIns="0" tIns="0" bIns="0">
+          <a:bodyPr wrap="square" lIns="0" tIns="0" rIns="0" bIns="0">
             <a:spAutoFit/>
           </a:bodyPr>
           <a:lstStyle/>
@@ -13552,7 +13709,7 @@
           <a:noFill/>
         </p:spPr>
         <p:txBody>
-          <a:bodyPr wrap="square" lIns="0" rIns="0" tIns="0" bIns="0">
+          <a:bodyPr wrap="square" lIns="0" tIns="0" rIns="0" bIns="0">
             <a:spAutoFit/>
           </a:bodyPr>
           <a:lstStyle/>
@@ -13631,7 +13788,7 @@
 </file>
 
 <file path=ppt/slides/slide21.xml><?xml version="1.0" encoding="utf-8"?>
-<p:sld xmlns:a="http://schemas.openxmlformats.org/drawingml/2006/main" xmlns:p="http://schemas.openxmlformats.org/presentationml/2006/main" xmlns:r="http://schemas.openxmlformats.org/officeDocument/2006/relationships">
+<p:sld xmlns:a="http://schemas.openxmlformats.org/drawingml/2006/main" xmlns:r="http://schemas.openxmlformats.org/officeDocument/2006/relationships" xmlns:p="http://schemas.openxmlformats.org/presentationml/2006/main">
   <p:cSld>
     <p:spTree>
       <p:nvGrpSpPr>
@@ -13639,7 +13796,14 @@
         <p:cNvGrpSpPr/>
         <p:nvPr/>
       </p:nvGrpSpPr>
-      <p:grpSpPr/>
+      <p:grpSpPr>
+        <a:xfrm>
+          <a:off x="0" y="0"/>
+          <a:ext cx="0" cy="0"/>
+          <a:chOff x="0" y="0"/>
+          <a:chExt cx="0" cy="0"/>
+        </a:xfrm>
+      </p:grpSpPr>
       <p:sp>
         <p:nvSpPr>
           <p:cNvPr id="2" name="Rectangle 1"/>
@@ -13681,6 +13845,7 @@
           <a:lstStyle/>
           <a:p>
             <a:pPr algn="ctr"/>
+            <a:endParaRPr/>
           </a:p>
         </p:txBody>
       </p:sp>
@@ -13701,7 +13866,7 @@
           <a:noFill/>
         </p:spPr>
         <p:txBody>
-          <a:bodyPr wrap="square" lIns="0" rIns="0" tIns="0" bIns="0">
+          <a:bodyPr wrap="square" lIns="0" tIns="0" rIns="0" bIns="0">
             <a:spAutoFit/>
           </a:bodyPr>
           <a:lstStyle/>
@@ -13740,7 +13905,7 @@
           <a:noFill/>
         </p:spPr>
         <p:txBody>
-          <a:bodyPr wrap="square" lIns="0" rIns="0" tIns="0" bIns="0">
+          <a:bodyPr wrap="square" lIns="0" tIns="0" rIns="0" bIns="0">
             <a:spAutoFit/>
           </a:bodyPr>
           <a:lstStyle/>
@@ -13803,6 +13968,7 @@
           <a:lstStyle/>
           <a:p>
             <a:pPr algn="ctr"/>
+            <a:endParaRPr/>
           </a:p>
         </p:txBody>
       </p:sp>
@@ -13823,7 +13989,7 @@
           <a:noFill/>
         </p:spPr>
         <p:txBody>
-          <a:bodyPr wrap="square" lIns="0" rIns="0" tIns="0" bIns="0">
+          <a:bodyPr wrap="square" lIns="0" tIns="0" rIns="0" bIns="0">
             <a:spAutoFit/>
           </a:bodyPr>
           <a:lstStyle/>
@@ -13862,7 +14028,7 @@
           <a:noFill/>
         </p:spPr>
         <p:txBody>
-          <a:bodyPr wrap="square" lIns="0" rIns="0" tIns="0" bIns="0">
+          <a:bodyPr wrap="square" lIns="0" tIns="0" rIns="0" bIns="0">
             <a:spAutoFit/>
           </a:bodyPr>
           <a:lstStyle/>
@@ -13925,6 +14091,7 @@
           <a:lstStyle/>
           <a:p>
             <a:pPr algn="ctr"/>
+            <a:endParaRPr/>
           </a:p>
         </p:txBody>
       </p:sp>
@@ -13945,7 +14112,7 @@
           <a:noFill/>
         </p:spPr>
         <p:txBody>
-          <a:bodyPr wrap="square" lIns="0" rIns="0" tIns="0" bIns="0">
+          <a:bodyPr wrap="square" lIns="0" tIns="0" rIns="0" bIns="0">
             <a:spAutoFit/>
           </a:bodyPr>
           <a:lstStyle/>
@@ -14008,6 +14175,7 @@
           <a:lstStyle/>
           <a:p>
             <a:pPr algn="ctr"/>
+            <a:endParaRPr/>
           </a:p>
         </p:txBody>
       </p:sp>
@@ -14028,7 +14196,7 @@
           <a:noFill/>
         </p:spPr>
         <p:txBody>
-          <a:bodyPr wrap="square" lIns="0" rIns="0" tIns="0" bIns="0">
+          <a:bodyPr wrap="square" lIns="0" tIns="0" rIns="0" bIns="0">
             <a:spAutoFit/>
           </a:bodyPr>
           <a:lstStyle/>
@@ -14091,6 +14259,7 @@
           <a:lstStyle/>
           <a:p>
             <a:pPr algn="ctr"/>
+            <a:endParaRPr/>
           </a:p>
         </p:txBody>
       </p:sp>
@@ -14111,7 +14280,7 @@
           <a:noFill/>
         </p:spPr>
         <p:txBody>
-          <a:bodyPr wrap="square" lIns="0" rIns="0" tIns="0" bIns="0">
+          <a:bodyPr wrap="square" lIns="0" tIns="0" rIns="0" bIns="0">
             <a:spAutoFit/>
           </a:bodyPr>
           <a:lstStyle/>
@@ -14174,6 +14343,7 @@
           <a:lstStyle/>
           <a:p>
             <a:pPr algn="ctr"/>
+            <a:endParaRPr/>
           </a:p>
         </p:txBody>
       </p:sp>
@@ -14194,7 +14364,7 @@
           <a:noFill/>
         </p:spPr>
         <p:txBody>
-          <a:bodyPr wrap="square" lIns="0" rIns="0" tIns="0" bIns="0">
+          <a:bodyPr wrap="square" lIns="0" tIns="0" rIns="0" bIns="0">
             <a:spAutoFit/>
           </a:bodyPr>
           <a:lstStyle/>
@@ -14257,6 +14427,7 @@
           <a:lstStyle/>
           <a:p>
             <a:pPr algn="ctr"/>
+            <a:endParaRPr/>
           </a:p>
         </p:txBody>
       </p:sp>
@@ -14277,7 +14448,7 @@
           <a:noFill/>
         </p:spPr>
         <p:txBody>
-          <a:bodyPr wrap="square" lIns="0" rIns="0" tIns="0" bIns="0">
+          <a:bodyPr wrap="square" lIns="0" tIns="0" rIns="0" bIns="0">
             <a:spAutoFit/>
           </a:bodyPr>
           <a:lstStyle/>
@@ -14340,6 +14511,7 @@
           <a:lstStyle/>
           <a:p>
             <a:pPr algn="ctr"/>
+            <a:endParaRPr/>
           </a:p>
         </p:txBody>
       </p:sp>
@@ -14360,7 +14532,7 @@
           <a:noFill/>
         </p:spPr>
         <p:txBody>
-          <a:bodyPr wrap="square" lIns="0" rIns="0" tIns="0" bIns="0">
+          <a:bodyPr wrap="square" lIns="0" tIns="0" rIns="0" bIns="0">
             <a:spAutoFit/>
           </a:bodyPr>
           <a:lstStyle/>
@@ -14423,6 +14595,7 @@
           <a:lstStyle/>
           <a:p>
             <a:pPr algn="ctr"/>
+            <a:endParaRPr/>
           </a:p>
         </p:txBody>
       </p:sp>
@@ -14443,7 +14616,7 @@
           <a:noFill/>
         </p:spPr>
         <p:txBody>
-          <a:bodyPr wrap="square" lIns="0" rIns="0" tIns="0" bIns="0">
+          <a:bodyPr wrap="square" lIns="0" tIns="0" rIns="0" bIns="0">
             <a:spAutoFit/>
           </a:bodyPr>
           <a:lstStyle/>
@@ -14506,6 +14679,7 @@
           <a:lstStyle/>
           <a:p>
             <a:pPr algn="ctr"/>
+            <a:endParaRPr/>
           </a:p>
         </p:txBody>
       </p:sp>
@@ -14526,7 +14700,7 @@
           <a:noFill/>
         </p:spPr>
         <p:txBody>
-          <a:bodyPr wrap="square" lIns="0" rIns="0" tIns="0" bIns="0">
+          <a:bodyPr wrap="square" lIns="0" tIns="0" rIns="0" bIns="0">
             <a:spAutoFit/>
           </a:bodyPr>
           <a:lstStyle/>
@@ -14557,7 +14731,7 @@
 </file>
 
 <file path=ppt/slides/slide22.xml><?xml version="1.0" encoding="utf-8"?>
-<p:sld xmlns:a="http://schemas.openxmlformats.org/drawingml/2006/main" xmlns:p="http://schemas.openxmlformats.org/presentationml/2006/main" xmlns:r="http://schemas.openxmlformats.org/officeDocument/2006/relationships">
+<p:sld xmlns:a="http://schemas.openxmlformats.org/drawingml/2006/main" xmlns:r="http://schemas.openxmlformats.org/officeDocument/2006/relationships" xmlns:p="http://schemas.openxmlformats.org/presentationml/2006/main">
   <p:cSld>
     <p:spTree>
       <p:nvGrpSpPr>
@@ -14565,7 +14739,14 @@
         <p:cNvGrpSpPr/>
         <p:nvPr/>
       </p:nvGrpSpPr>
-      <p:grpSpPr/>
+      <p:grpSpPr>
+        <a:xfrm>
+          <a:off x="0" y="0"/>
+          <a:ext cx="0" cy="0"/>
+          <a:chOff x="0" y="0"/>
+          <a:chExt cx="0" cy="0"/>
+        </a:xfrm>
+      </p:grpSpPr>
       <p:sp>
         <p:nvSpPr>
           <p:cNvPr id="2" name="Rectangle 1"/>
@@ -14607,6 +14788,7 @@
           <a:lstStyle/>
           <a:p>
             <a:pPr algn="ctr"/>
+            <a:endParaRPr/>
           </a:p>
         </p:txBody>
       </p:sp>
@@ -14627,7 +14809,7 @@
           <a:noFill/>
         </p:spPr>
         <p:txBody>
-          <a:bodyPr wrap="square" lIns="0" rIns="0" tIns="0" bIns="0">
+          <a:bodyPr wrap="square" lIns="0" tIns="0" rIns="0" bIns="0">
             <a:spAutoFit/>
           </a:bodyPr>
           <a:lstStyle/>
@@ -14666,7 +14848,7 @@
           <a:noFill/>
         </p:spPr>
         <p:txBody>
-          <a:bodyPr wrap="square" lIns="0" rIns="0" tIns="0" bIns="0">
+          <a:bodyPr wrap="square" lIns="0" tIns="0" rIns="0" bIns="0">
             <a:spAutoFit/>
           </a:bodyPr>
           <a:lstStyle/>
@@ -14729,6 +14911,7 @@
           <a:lstStyle/>
           <a:p>
             <a:pPr algn="ctr"/>
+            <a:endParaRPr/>
           </a:p>
         </p:txBody>
       </p:sp>
@@ -14749,7 +14932,7 @@
           <a:noFill/>
         </p:spPr>
         <p:txBody>
-          <a:bodyPr wrap="square" lIns="0" rIns="0" tIns="0" bIns="0">
+          <a:bodyPr wrap="square" lIns="0" tIns="0" rIns="0" bIns="0">
             <a:spAutoFit/>
           </a:bodyPr>
           <a:lstStyle/>
@@ -14788,7 +14971,7 @@
           <a:noFill/>
         </p:spPr>
         <p:txBody>
-          <a:bodyPr wrap="square" lIns="0" rIns="0" tIns="0" bIns="0">
+          <a:bodyPr wrap="square" lIns="0" tIns="0" rIns="0" bIns="0">
             <a:spAutoFit/>
           </a:bodyPr>
           <a:lstStyle/>
@@ -14851,6 +15034,7 @@
           <a:lstStyle/>
           <a:p>
             <a:pPr algn="ctr"/>
+            <a:endParaRPr/>
           </a:p>
         </p:txBody>
       </p:sp>
@@ -14895,6 +15079,7 @@
           <a:lstStyle/>
           <a:p>
             <a:pPr algn="ctr"/>
+            <a:endParaRPr/>
           </a:p>
         </p:txBody>
       </p:sp>
@@ -14915,7 +15100,7 @@
           <a:noFill/>
         </p:spPr>
         <p:txBody>
-          <a:bodyPr wrap="square" lIns="0" rIns="0" tIns="0" bIns="0">
+          <a:bodyPr wrap="square" lIns="0" tIns="0" rIns="0" bIns="0">
             <a:spAutoFit/>
           </a:bodyPr>
           <a:lstStyle/>
@@ -14954,7 +15139,7 @@
           <a:noFill/>
         </p:spPr>
         <p:txBody>
-          <a:bodyPr wrap="square" lIns="0" rIns="0" tIns="0" bIns="0">
+          <a:bodyPr wrap="square" lIns="0" tIns="0" rIns="0" bIns="0">
             <a:spAutoFit/>
           </a:bodyPr>
           <a:lstStyle/>
@@ -15017,6 +15202,7 @@
           <a:lstStyle/>
           <a:p>
             <a:pPr algn="ctr"/>
+            <a:endParaRPr/>
           </a:p>
         </p:txBody>
       </p:sp>
@@ -15061,6 +15247,7 @@
           <a:lstStyle/>
           <a:p>
             <a:pPr algn="ctr"/>
+            <a:endParaRPr/>
           </a:p>
         </p:txBody>
       </p:sp>
@@ -15081,7 +15268,7 @@
           <a:noFill/>
         </p:spPr>
         <p:txBody>
-          <a:bodyPr wrap="square" lIns="0" rIns="0" tIns="0" bIns="0">
+          <a:bodyPr wrap="square" lIns="0" tIns="0" rIns="0" bIns="0">
             <a:spAutoFit/>
           </a:bodyPr>
           <a:lstStyle/>
@@ -15120,7 +15307,7 @@
           <a:noFill/>
         </p:spPr>
         <p:txBody>
-          <a:bodyPr wrap="square" lIns="0" rIns="0" tIns="0" bIns="0">
+          <a:bodyPr wrap="square" lIns="0" tIns="0" rIns="0" bIns="0">
             <a:spAutoFit/>
           </a:bodyPr>
           <a:lstStyle/>
@@ -15183,6 +15370,7 @@
           <a:lstStyle/>
           <a:p>
             <a:pPr algn="ctr"/>
+            <a:endParaRPr/>
           </a:p>
         </p:txBody>
       </p:sp>
@@ -15227,6 +15415,7 @@
           <a:lstStyle/>
           <a:p>
             <a:pPr algn="ctr"/>
+            <a:endParaRPr/>
           </a:p>
         </p:txBody>
       </p:sp>
@@ -15247,7 +15436,7 @@
           <a:noFill/>
         </p:spPr>
         <p:txBody>
-          <a:bodyPr wrap="square" lIns="0" rIns="0" tIns="0" bIns="0">
+          <a:bodyPr wrap="square" lIns="0" tIns="0" rIns="0" bIns="0">
             <a:spAutoFit/>
           </a:bodyPr>
           <a:lstStyle/>
@@ -15286,7 +15475,7 @@
           <a:noFill/>
         </p:spPr>
         <p:txBody>
-          <a:bodyPr wrap="square" lIns="0" rIns="0" tIns="0" bIns="0">
+          <a:bodyPr wrap="square" lIns="0" tIns="0" rIns="0" bIns="0">
             <a:spAutoFit/>
           </a:bodyPr>
           <a:lstStyle/>
@@ -15349,6 +15538,7 @@
           <a:lstStyle/>
           <a:p>
             <a:pPr algn="ctr"/>
+            <a:endParaRPr/>
           </a:p>
         </p:txBody>
       </p:sp>
@@ -15393,6 +15583,7 @@
           <a:lstStyle/>
           <a:p>
             <a:pPr algn="ctr"/>
+            <a:endParaRPr/>
           </a:p>
         </p:txBody>
       </p:sp>
@@ -15413,7 +15604,7 @@
           <a:noFill/>
         </p:spPr>
         <p:txBody>
-          <a:bodyPr wrap="square" lIns="0" rIns="0" tIns="0" bIns="0">
+          <a:bodyPr wrap="square" lIns="0" tIns="0" rIns="0" bIns="0">
             <a:spAutoFit/>
           </a:bodyPr>
           <a:lstStyle/>
@@ -15452,7 +15643,7 @@
           <a:noFill/>
         </p:spPr>
         <p:txBody>
-          <a:bodyPr wrap="square" lIns="0" rIns="0" tIns="0" bIns="0">
+          <a:bodyPr wrap="square" lIns="0" tIns="0" rIns="0" bIns="0">
             <a:spAutoFit/>
           </a:bodyPr>
           <a:lstStyle/>
@@ -15515,6 +15706,7 @@
           <a:lstStyle/>
           <a:p>
             <a:pPr algn="ctr"/>
+            <a:endParaRPr/>
           </a:p>
         </p:txBody>
       </p:sp>
@@ -15559,6 +15751,7 @@
           <a:lstStyle/>
           <a:p>
             <a:pPr algn="ctr"/>
+            <a:endParaRPr/>
           </a:p>
         </p:txBody>
       </p:sp>
@@ -15579,7 +15772,7 @@
           <a:noFill/>
         </p:spPr>
         <p:txBody>
-          <a:bodyPr wrap="square" lIns="0" rIns="0" tIns="0" bIns="0">
+          <a:bodyPr wrap="square" lIns="0" tIns="0" rIns="0" bIns="0">
             <a:spAutoFit/>
           </a:bodyPr>
           <a:lstStyle/>
@@ -15618,7 +15811,7 @@
           <a:noFill/>
         </p:spPr>
         <p:txBody>
-          <a:bodyPr wrap="square" lIns="0" rIns="0" tIns="0" bIns="0">
+          <a:bodyPr wrap="square" lIns="0" tIns="0" rIns="0" bIns="0">
             <a:spAutoFit/>
           </a:bodyPr>
           <a:lstStyle/>
@@ -15681,6 +15874,7 @@
           <a:lstStyle/>
           <a:p>
             <a:pPr algn="ctr"/>
+            <a:endParaRPr/>
           </a:p>
         </p:txBody>
       </p:sp>
@@ -15725,6 +15919,7 @@
           <a:lstStyle/>
           <a:p>
             <a:pPr algn="ctr"/>
+            <a:endParaRPr/>
           </a:p>
         </p:txBody>
       </p:sp>
@@ -15745,7 +15940,7 @@
           <a:noFill/>
         </p:spPr>
         <p:txBody>
-          <a:bodyPr wrap="square" lIns="0" rIns="0" tIns="0" bIns="0">
+          <a:bodyPr wrap="square" lIns="0" tIns="0" rIns="0" bIns="0">
             <a:spAutoFit/>
           </a:bodyPr>
           <a:lstStyle/>
@@ -15784,7 +15979,7 @@
           <a:noFill/>
         </p:spPr>
         <p:txBody>
-          <a:bodyPr wrap="square" lIns="0" rIns="0" tIns="0" bIns="0">
+          <a:bodyPr wrap="square" lIns="0" tIns="0" rIns="0" bIns="0">
             <a:spAutoFit/>
           </a:bodyPr>
           <a:lstStyle/>
@@ -15815,7 +16010,7 @@
 </file>
 
 <file path=ppt/slides/slide3.xml><?xml version="1.0" encoding="utf-8"?>
-<p:sld xmlns:a="http://schemas.openxmlformats.org/drawingml/2006/main" xmlns:p="http://schemas.openxmlformats.org/presentationml/2006/main" xmlns:r="http://schemas.openxmlformats.org/officeDocument/2006/relationships">
+<p:sld xmlns:a="http://schemas.openxmlformats.org/drawingml/2006/main" xmlns:r="http://schemas.openxmlformats.org/officeDocument/2006/relationships" xmlns:p="http://schemas.openxmlformats.org/presentationml/2006/main">
   <p:cSld>
     <p:spTree>
       <p:nvGrpSpPr>
@@ -15823,7 +16018,14 @@
         <p:cNvGrpSpPr/>
         <p:nvPr/>
       </p:nvGrpSpPr>
-      <p:grpSpPr/>
+      <p:grpSpPr>
+        <a:xfrm>
+          <a:off x="0" y="0"/>
+          <a:ext cx="0" cy="0"/>
+          <a:chOff x="0" y="0"/>
+          <a:chExt cx="0" cy="0"/>
+        </a:xfrm>
+      </p:grpSpPr>
       <p:sp>
         <p:nvSpPr>
           <p:cNvPr id="2" name="Rectangle 1"/>
@@ -15865,6 +16067,7 @@
           <a:lstStyle/>
           <a:p>
             <a:pPr algn="ctr"/>
+            <a:endParaRPr/>
           </a:p>
         </p:txBody>
       </p:sp>
@@ -15885,7 +16088,7 @@
           <a:noFill/>
         </p:spPr>
         <p:txBody>
-          <a:bodyPr wrap="square" lIns="0" rIns="0" tIns="0" bIns="0">
+          <a:bodyPr wrap="square" lIns="0" tIns="0" rIns="0" bIns="0">
             <a:spAutoFit/>
           </a:bodyPr>
           <a:lstStyle/>
@@ -15924,7 +16127,7 @@
           <a:noFill/>
         </p:spPr>
         <p:txBody>
-          <a:bodyPr wrap="square" lIns="0" rIns="0" tIns="0" bIns="0">
+          <a:bodyPr wrap="square" lIns="0" tIns="0" rIns="0" bIns="0">
             <a:spAutoFit/>
           </a:bodyPr>
           <a:lstStyle/>
@@ -15987,6 +16190,7 @@
           <a:lstStyle/>
           <a:p>
             <a:pPr algn="ctr"/>
+            <a:endParaRPr/>
           </a:p>
         </p:txBody>
       </p:sp>
@@ -16007,7 +16211,7 @@
           <a:noFill/>
         </p:spPr>
         <p:txBody>
-          <a:bodyPr wrap="square" lIns="0" rIns="0" tIns="0" bIns="0">
+          <a:bodyPr wrap="square" lIns="0" tIns="0" rIns="0" bIns="0">
             <a:spAutoFit/>
           </a:bodyPr>
           <a:lstStyle/>
@@ -16046,7 +16250,7 @@
           <a:noFill/>
         </p:spPr>
         <p:txBody>
-          <a:bodyPr wrap="square" lIns="0" rIns="0" tIns="0" bIns="0">
+          <a:bodyPr wrap="square" lIns="0" tIns="0" rIns="0" bIns="0">
             <a:spAutoFit/>
           </a:bodyPr>
           <a:lstStyle/>
@@ -16109,6 +16313,7 @@
           <a:lstStyle/>
           <a:p>
             <a:pPr algn="ctr"/>
+            <a:endParaRPr/>
           </a:p>
         </p:txBody>
       </p:sp>
@@ -16129,7 +16334,7 @@
           <a:noFill/>
         </p:spPr>
         <p:txBody>
-          <a:bodyPr wrap="square" lIns="0" rIns="0" tIns="0" bIns="0">
+          <a:bodyPr wrap="square" lIns="0" tIns="0" rIns="0" bIns="0">
             <a:spAutoFit/>
           </a:bodyPr>
           <a:lstStyle/>
@@ -16168,7 +16373,7 @@
           <a:noFill/>
         </p:spPr>
         <p:txBody>
-          <a:bodyPr wrap="square" lIns="0" rIns="0" tIns="0" bIns="0">
+          <a:bodyPr wrap="square" lIns="0" tIns="0" rIns="0" bIns="0">
             <a:spAutoFit/>
           </a:bodyPr>
           <a:lstStyle/>
@@ -16207,7 +16412,7 @@
           <a:noFill/>
         </p:spPr>
         <p:txBody>
-          <a:bodyPr wrap="square" lIns="0" rIns="0" tIns="0" bIns="0">
+          <a:bodyPr wrap="square" lIns="0" tIns="0" rIns="0" bIns="0">
             <a:spAutoFit/>
           </a:bodyPr>
           <a:lstStyle/>
@@ -16246,7 +16451,7 @@
           <a:noFill/>
         </p:spPr>
         <p:txBody>
-          <a:bodyPr wrap="square" lIns="0" rIns="0" tIns="0" bIns="0">
+          <a:bodyPr wrap="square" lIns="0" tIns="0" rIns="0" bIns="0">
             <a:spAutoFit/>
           </a:bodyPr>
           <a:lstStyle/>
@@ -16285,7 +16490,7 @@
           <a:noFill/>
         </p:spPr>
         <p:txBody>
-          <a:bodyPr wrap="square" lIns="0" rIns="0" tIns="0" bIns="0">
+          <a:bodyPr wrap="square" lIns="0" tIns="0" rIns="0" bIns="0">
             <a:spAutoFit/>
           </a:bodyPr>
           <a:lstStyle/>
@@ -16324,7 +16529,7 @@
           <a:noFill/>
         </p:spPr>
         <p:txBody>
-          <a:bodyPr wrap="square" lIns="0" rIns="0" tIns="0" bIns="0">
+          <a:bodyPr wrap="square" lIns="0" tIns="0" rIns="0" bIns="0">
             <a:spAutoFit/>
           </a:bodyPr>
           <a:lstStyle/>
@@ -16363,7 +16568,7 @@
           <a:noFill/>
         </p:spPr>
         <p:txBody>
-          <a:bodyPr wrap="square" lIns="0" rIns="0" tIns="0" bIns="0">
+          <a:bodyPr wrap="square" lIns="0" tIns="0" rIns="0" bIns="0">
             <a:spAutoFit/>
           </a:bodyPr>
           <a:lstStyle/>
@@ -16402,7 +16607,7 @@
           <a:noFill/>
         </p:spPr>
         <p:txBody>
-          <a:bodyPr wrap="square" lIns="0" rIns="0" tIns="0" bIns="0">
+          <a:bodyPr wrap="square" lIns="0" tIns="0" rIns="0" bIns="0">
             <a:spAutoFit/>
           </a:bodyPr>
           <a:lstStyle/>
@@ -16465,6 +16670,7 @@
           <a:lstStyle/>
           <a:p>
             <a:pPr algn="ctr"/>
+            <a:endParaRPr/>
           </a:p>
         </p:txBody>
       </p:sp>
@@ -16485,7 +16691,7 @@
           <a:noFill/>
         </p:spPr>
         <p:txBody>
-          <a:bodyPr wrap="square" lIns="0" rIns="0" tIns="0" bIns="0">
+          <a:bodyPr wrap="square" lIns="0" tIns="0" rIns="0" bIns="0">
             <a:spAutoFit/>
           </a:bodyPr>
           <a:lstStyle/>
@@ -16524,7 +16730,7 @@
           <a:noFill/>
         </p:spPr>
         <p:txBody>
-          <a:bodyPr wrap="square" lIns="0" rIns="0" tIns="0" bIns="0">
+          <a:bodyPr wrap="square" lIns="0" tIns="0" rIns="0" bIns="0">
             <a:spAutoFit/>
           </a:bodyPr>
           <a:lstStyle/>
@@ -16563,7 +16769,7 @@
           <a:noFill/>
         </p:spPr>
         <p:txBody>
-          <a:bodyPr wrap="square" lIns="0" rIns="0" tIns="0" bIns="0">
+          <a:bodyPr wrap="square" lIns="0" tIns="0" rIns="0" bIns="0">
             <a:spAutoFit/>
           </a:bodyPr>
           <a:lstStyle/>
@@ -16602,7 +16808,7 @@
           <a:noFill/>
         </p:spPr>
         <p:txBody>
-          <a:bodyPr wrap="square" lIns="0" rIns="0" tIns="0" bIns="0">
+          <a:bodyPr wrap="square" lIns="0" tIns="0" rIns="0" bIns="0">
             <a:spAutoFit/>
           </a:bodyPr>
           <a:lstStyle/>
@@ -16641,7 +16847,7 @@
           <a:noFill/>
         </p:spPr>
         <p:txBody>
-          <a:bodyPr wrap="square" lIns="0" rIns="0" tIns="0" bIns="0">
+          <a:bodyPr wrap="square" lIns="0" tIns="0" rIns="0" bIns="0">
             <a:spAutoFit/>
           </a:bodyPr>
           <a:lstStyle/>
@@ -16680,7 +16886,7 @@
           <a:noFill/>
         </p:spPr>
         <p:txBody>
-          <a:bodyPr wrap="square" lIns="0" rIns="0" tIns="0" bIns="0">
+          <a:bodyPr wrap="square" lIns="0" tIns="0" rIns="0" bIns="0">
             <a:spAutoFit/>
           </a:bodyPr>
           <a:lstStyle/>
@@ -16719,7 +16925,7 @@
           <a:noFill/>
         </p:spPr>
         <p:txBody>
-          <a:bodyPr wrap="square" lIns="0" rIns="0" tIns="0" bIns="0">
+          <a:bodyPr wrap="square" lIns="0" tIns="0" rIns="0" bIns="0">
             <a:spAutoFit/>
           </a:bodyPr>
           <a:lstStyle/>
@@ -16758,7 +16964,7 @@
           <a:noFill/>
         </p:spPr>
         <p:txBody>
-          <a:bodyPr wrap="square" lIns="0" rIns="0" tIns="0" bIns="0">
+          <a:bodyPr wrap="square" lIns="0" tIns="0" rIns="0" bIns="0">
             <a:spAutoFit/>
           </a:bodyPr>
           <a:lstStyle/>
@@ -16821,6 +17027,7 @@
           <a:lstStyle/>
           <a:p>
             <a:pPr algn="ctr"/>
+            <a:endParaRPr/>
           </a:p>
         </p:txBody>
       </p:sp>
@@ -16841,7 +17048,7 @@
           <a:noFill/>
         </p:spPr>
         <p:txBody>
-          <a:bodyPr wrap="square" lIns="0" rIns="0" tIns="0" bIns="0">
+          <a:bodyPr wrap="square" lIns="0" tIns="0" rIns="0" bIns="0">
             <a:spAutoFit/>
           </a:bodyPr>
           <a:lstStyle/>
@@ -16880,7 +17087,7 @@
           <a:noFill/>
         </p:spPr>
         <p:txBody>
-          <a:bodyPr wrap="square" lIns="0" rIns="0" tIns="0" bIns="0">
+          <a:bodyPr wrap="square" lIns="0" tIns="0" rIns="0" bIns="0">
             <a:spAutoFit/>
           </a:bodyPr>
           <a:lstStyle/>
@@ -16919,7 +17126,7 @@
           <a:noFill/>
         </p:spPr>
         <p:txBody>
-          <a:bodyPr wrap="square" lIns="0" rIns="0" tIns="0" bIns="0">
+          <a:bodyPr wrap="square" lIns="0" tIns="0" rIns="0" bIns="0">
             <a:spAutoFit/>
           </a:bodyPr>
           <a:lstStyle/>
@@ -16958,7 +17165,7 @@
           <a:noFill/>
         </p:spPr>
         <p:txBody>
-          <a:bodyPr wrap="square" lIns="0" rIns="0" tIns="0" bIns="0">
+          <a:bodyPr wrap="square" lIns="0" tIns="0" rIns="0" bIns="0">
             <a:spAutoFit/>
           </a:bodyPr>
           <a:lstStyle/>
@@ -16997,7 +17204,7 @@
           <a:noFill/>
         </p:spPr>
         <p:txBody>
-          <a:bodyPr wrap="square" lIns="0" rIns="0" tIns="0" bIns="0">
+          <a:bodyPr wrap="square" lIns="0" tIns="0" rIns="0" bIns="0">
             <a:spAutoFit/>
           </a:bodyPr>
           <a:lstStyle/>
@@ -17036,7 +17243,7 @@
           <a:noFill/>
         </p:spPr>
         <p:txBody>
-          <a:bodyPr wrap="square" lIns="0" rIns="0" tIns="0" bIns="0">
+          <a:bodyPr wrap="square" lIns="0" tIns="0" rIns="0" bIns="0">
             <a:spAutoFit/>
           </a:bodyPr>
           <a:lstStyle/>
@@ -17075,7 +17282,7 @@
           <a:noFill/>
         </p:spPr>
         <p:txBody>
-          <a:bodyPr wrap="square" lIns="0" rIns="0" tIns="0" bIns="0">
+          <a:bodyPr wrap="square" lIns="0" tIns="0" rIns="0" bIns="0">
             <a:spAutoFit/>
           </a:bodyPr>
           <a:lstStyle/>
@@ -17114,7 +17321,7 @@
           <a:noFill/>
         </p:spPr>
         <p:txBody>
-          <a:bodyPr wrap="square" lIns="0" rIns="0" tIns="0" bIns="0">
+          <a:bodyPr wrap="square" lIns="0" tIns="0" rIns="0" bIns="0">
             <a:spAutoFit/>
           </a:bodyPr>
           <a:lstStyle/>
@@ -17177,6 +17384,7 @@
           <a:lstStyle/>
           <a:p>
             <a:pPr algn="ctr"/>
+            <a:endParaRPr/>
           </a:p>
         </p:txBody>
       </p:sp>
@@ -17197,7 +17405,7 @@
           <a:noFill/>
         </p:spPr>
         <p:txBody>
-          <a:bodyPr wrap="square" lIns="0" rIns="0" tIns="0" bIns="0">
+          <a:bodyPr wrap="square" lIns="0" tIns="0" rIns="0" bIns="0">
             <a:spAutoFit/>
           </a:bodyPr>
           <a:lstStyle/>
@@ -17236,7 +17444,7 @@
           <a:noFill/>
         </p:spPr>
         <p:txBody>
-          <a:bodyPr wrap="square" lIns="0" rIns="0" tIns="0" bIns="0">
+          <a:bodyPr wrap="square" lIns="0" tIns="0" rIns="0" bIns="0">
             <a:spAutoFit/>
           </a:bodyPr>
           <a:lstStyle/>
@@ -17275,7 +17483,7 @@
           <a:noFill/>
         </p:spPr>
         <p:txBody>
-          <a:bodyPr wrap="square" lIns="0" rIns="0" tIns="0" bIns="0">
+          <a:bodyPr wrap="square" lIns="0" tIns="0" rIns="0" bIns="0">
             <a:spAutoFit/>
           </a:bodyPr>
           <a:lstStyle/>
@@ -17314,7 +17522,7 @@
           <a:noFill/>
         </p:spPr>
         <p:txBody>
-          <a:bodyPr wrap="square" lIns="0" rIns="0" tIns="0" bIns="0">
+          <a:bodyPr wrap="square" lIns="0" tIns="0" rIns="0" bIns="0">
             <a:spAutoFit/>
           </a:bodyPr>
           <a:lstStyle/>
@@ -17353,7 +17561,7 @@
           <a:noFill/>
         </p:spPr>
         <p:txBody>
-          <a:bodyPr wrap="square" lIns="0" rIns="0" tIns="0" bIns="0">
+          <a:bodyPr wrap="square" lIns="0" tIns="0" rIns="0" bIns="0">
             <a:spAutoFit/>
           </a:bodyPr>
           <a:lstStyle/>
@@ -17392,7 +17600,7 @@
           <a:noFill/>
         </p:spPr>
         <p:txBody>
-          <a:bodyPr wrap="square" lIns="0" rIns="0" tIns="0" bIns="0">
+          <a:bodyPr wrap="square" lIns="0" tIns="0" rIns="0" bIns="0">
             <a:spAutoFit/>
           </a:bodyPr>
           <a:lstStyle/>
@@ -17431,7 +17639,7 @@
           <a:noFill/>
         </p:spPr>
         <p:txBody>
-          <a:bodyPr wrap="square" lIns="0" rIns="0" tIns="0" bIns="0">
+          <a:bodyPr wrap="square" lIns="0" tIns="0" rIns="0" bIns="0">
             <a:spAutoFit/>
           </a:bodyPr>
           <a:lstStyle/>
@@ -17470,7 +17678,7 @@
           <a:noFill/>
         </p:spPr>
         <p:txBody>
-          <a:bodyPr wrap="square" lIns="0" rIns="0" tIns="0" bIns="0">
+          <a:bodyPr wrap="square" lIns="0" tIns="0" rIns="0" bIns="0">
             <a:spAutoFit/>
           </a:bodyPr>
           <a:lstStyle/>
@@ -17533,6 +17741,7 @@
           <a:lstStyle/>
           <a:p>
             <a:pPr algn="ctr"/>
+            <a:endParaRPr/>
           </a:p>
         </p:txBody>
       </p:sp>
@@ -17577,6 +17786,7 @@
           <a:lstStyle/>
           <a:p>
             <a:pPr algn="ctr"/>
+            <a:endParaRPr/>
           </a:p>
         </p:txBody>
       </p:sp>
@@ -17597,7 +17807,7 @@
           <a:noFill/>
         </p:spPr>
         <p:txBody>
-          <a:bodyPr wrap="square" lIns="0" rIns="0" tIns="0" bIns="0">
+          <a:bodyPr wrap="square" lIns="0" tIns="0" rIns="0" bIns="0">
             <a:spAutoFit/>
           </a:bodyPr>
           <a:lstStyle/>
@@ -17636,7 +17846,7 @@
           <a:noFill/>
         </p:spPr>
         <p:txBody>
-          <a:bodyPr wrap="square" lIns="0" rIns="0" tIns="0" bIns="0">
+          <a:bodyPr wrap="square" lIns="0" tIns="0" rIns="0" bIns="0">
             <a:spAutoFit/>
           </a:bodyPr>
           <a:lstStyle/>
@@ -17731,7 +17941,7 @@
 </file>
 
 <file path=ppt/slides/slide4.xml><?xml version="1.0" encoding="utf-8"?>
-<p:sld xmlns:a="http://schemas.openxmlformats.org/drawingml/2006/main" xmlns:p="http://schemas.openxmlformats.org/presentationml/2006/main" xmlns:r="http://schemas.openxmlformats.org/officeDocument/2006/relationships">
+<p:sld xmlns:a="http://schemas.openxmlformats.org/drawingml/2006/main" xmlns:r="http://schemas.openxmlformats.org/officeDocument/2006/relationships" xmlns:p="http://schemas.openxmlformats.org/presentationml/2006/main">
   <p:cSld>
     <p:spTree>
       <p:nvGrpSpPr>
@@ -17739,7 +17949,14 @@
         <p:cNvGrpSpPr/>
         <p:nvPr/>
       </p:nvGrpSpPr>
-      <p:grpSpPr/>
+      <p:grpSpPr>
+        <a:xfrm>
+          <a:off x="0" y="0"/>
+          <a:ext cx="0" cy="0"/>
+          <a:chOff x="0" y="0"/>
+          <a:chExt cx="0" cy="0"/>
+        </a:xfrm>
+      </p:grpSpPr>
       <p:sp>
         <p:nvSpPr>
           <p:cNvPr id="2" name="Rectangle 1"/>
@@ -17781,6 +17998,7 @@
           <a:lstStyle/>
           <a:p>
             <a:pPr algn="ctr"/>
+            <a:endParaRPr/>
           </a:p>
         </p:txBody>
       </p:sp>
@@ -17801,7 +18019,7 @@
           <a:noFill/>
         </p:spPr>
         <p:txBody>
-          <a:bodyPr wrap="square" lIns="0" rIns="0" tIns="0" bIns="0">
+          <a:bodyPr wrap="square" lIns="0" tIns="0" rIns="0" bIns="0">
             <a:spAutoFit/>
           </a:bodyPr>
           <a:lstStyle/>
@@ -17840,7 +18058,7 @@
           <a:noFill/>
         </p:spPr>
         <p:txBody>
-          <a:bodyPr wrap="square" lIns="0" rIns="0" tIns="0" bIns="0">
+          <a:bodyPr wrap="square" lIns="0" tIns="0" rIns="0" bIns="0">
             <a:spAutoFit/>
           </a:bodyPr>
           <a:lstStyle/>
@@ -17903,6 +18121,7 @@
           <a:lstStyle/>
           <a:p>
             <a:pPr algn="ctr"/>
+            <a:endParaRPr/>
           </a:p>
         </p:txBody>
       </p:sp>
@@ -17923,7 +18142,7 @@
           <a:noFill/>
         </p:spPr>
         <p:txBody>
-          <a:bodyPr wrap="square" lIns="0" rIns="0" tIns="0" bIns="0">
+          <a:bodyPr wrap="square" lIns="0" tIns="0" rIns="0" bIns="0">
             <a:spAutoFit/>
           </a:bodyPr>
           <a:lstStyle/>
@@ -17962,7 +18181,7 @@
           <a:noFill/>
         </p:spPr>
         <p:txBody>
-          <a:bodyPr wrap="square" lIns="0" rIns="0" tIns="0" bIns="0">
+          <a:bodyPr wrap="square" lIns="0" tIns="0" rIns="0" bIns="0">
             <a:spAutoFit/>
           </a:bodyPr>
           <a:lstStyle/>
@@ -18025,6 +18244,7 @@
           <a:lstStyle/>
           <a:p>
             <a:pPr algn="ctr"/>
+            <a:endParaRPr/>
           </a:p>
         </p:txBody>
       </p:sp>
@@ -18069,6 +18289,7 @@
           <a:lstStyle/>
           <a:p>
             <a:pPr algn="ctr"/>
+            <a:endParaRPr/>
           </a:p>
         </p:txBody>
       </p:sp>
@@ -18089,7 +18310,7 @@
           <a:noFill/>
         </p:spPr>
         <p:txBody>
-          <a:bodyPr wrap="square" lIns="0" rIns="0" tIns="0" bIns="0">
+          <a:bodyPr wrap="square" lIns="0" tIns="0" rIns="0" bIns="0">
             <a:spAutoFit/>
           </a:bodyPr>
           <a:lstStyle/>
@@ -18128,7 +18349,7 @@
           <a:noFill/>
         </p:spPr>
         <p:txBody>
-          <a:bodyPr wrap="square" lIns="0" rIns="0" tIns="0" bIns="0">
+          <a:bodyPr wrap="square" lIns="0" tIns="0" rIns="0" bIns="0">
             <a:spAutoFit/>
           </a:bodyPr>
           <a:lstStyle/>
@@ -18223,6 +18444,7 @@
           <a:lstStyle/>
           <a:p>
             <a:pPr algn="ctr"/>
+            <a:endParaRPr/>
           </a:p>
         </p:txBody>
       </p:sp>
@@ -18267,6 +18489,7 @@
           <a:lstStyle/>
           <a:p>
             <a:pPr algn="ctr"/>
+            <a:endParaRPr/>
           </a:p>
         </p:txBody>
       </p:sp>
@@ -18287,7 +18510,7 @@
           <a:noFill/>
         </p:spPr>
         <p:txBody>
-          <a:bodyPr wrap="square" lIns="0" rIns="0" tIns="0" bIns="0">
+          <a:bodyPr wrap="square" lIns="0" tIns="0" rIns="0" bIns="0">
             <a:spAutoFit/>
           </a:bodyPr>
           <a:lstStyle/>
@@ -18326,7 +18549,7 @@
           <a:noFill/>
         </p:spPr>
         <p:txBody>
-          <a:bodyPr wrap="square" lIns="0" rIns="0" tIns="0" bIns="0">
+          <a:bodyPr wrap="square" lIns="0" tIns="0" rIns="0" bIns="0">
             <a:spAutoFit/>
           </a:bodyPr>
           <a:lstStyle/>
@@ -18421,6 +18644,7 @@
           <a:lstStyle/>
           <a:p>
             <a:pPr algn="ctr"/>
+            <a:endParaRPr/>
           </a:p>
         </p:txBody>
       </p:sp>
@@ -18465,6 +18689,7 @@
           <a:lstStyle/>
           <a:p>
             <a:pPr algn="ctr"/>
+            <a:endParaRPr/>
           </a:p>
         </p:txBody>
       </p:sp>
@@ -18485,7 +18710,7 @@
           <a:noFill/>
         </p:spPr>
         <p:txBody>
-          <a:bodyPr wrap="square" lIns="0" rIns="0" tIns="0" bIns="0">
+          <a:bodyPr wrap="square" lIns="0" tIns="0" rIns="0" bIns="0">
             <a:spAutoFit/>
           </a:bodyPr>
           <a:lstStyle/>
@@ -18524,7 +18749,7 @@
           <a:noFill/>
         </p:spPr>
         <p:txBody>
-          <a:bodyPr wrap="square" lIns="0" rIns="0" tIns="0" bIns="0">
+          <a:bodyPr wrap="square" lIns="0" tIns="0" rIns="0" bIns="0">
             <a:spAutoFit/>
           </a:bodyPr>
           <a:lstStyle/>
@@ -18587,7 +18812,7 @@
 </file>
 
 <file path=ppt/slides/slide5.xml><?xml version="1.0" encoding="utf-8"?>
-<p:sld xmlns:a="http://schemas.openxmlformats.org/drawingml/2006/main" xmlns:p="http://schemas.openxmlformats.org/presentationml/2006/main" xmlns:r="http://schemas.openxmlformats.org/officeDocument/2006/relationships">
+<p:sld xmlns:a="http://schemas.openxmlformats.org/drawingml/2006/main" xmlns:r="http://schemas.openxmlformats.org/officeDocument/2006/relationships" xmlns:p="http://schemas.openxmlformats.org/presentationml/2006/main">
   <p:cSld>
     <p:spTree>
       <p:nvGrpSpPr>
@@ -18595,7 +18820,14 @@
         <p:cNvGrpSpPr/>
         <p:nvPr/>
       </p:nvGrpSpPr>
-      <p:grpSpPr/>
+      <p:grpSpPr>
+        <a:xfrm>
+          <a:off x="0" y="0"/>
+          <a:ext cx="0" cy="0"/>
+          <a:chOff x="0" y="0"/>
+          <a:chExt cx="0" cy="0"/>
+        </a:xfrm>
+      </p:grpSpPr>
       <p:sp>
         <p:nvSpPr>
           <p:cNvPr id="2" name="Rectangle 1"/>
@@ -18637,6 +18869,7 @@
           <a:lstStyle/>
           <a:p>
             <a:pPr algn="ctr"/>
+            <a:endParaRPr/>
           </a:p>
         </p:txBody>
       </p:sp>
@@ -18657,7 +18890,7 @@
           <a:noFill/>
         </p:spPr>
         <p:txBody>
-          <a:bodyPr wrap="square" lIns="0" rIns="0" tIns="0" bIns="0">
+          <a:bodyPr wrap="square" lIns="0" tIns="0" rIns="0" bIns="0">
             <a:spAutoFit/>
           </a:bodyPr>
           <a:lstStyle/>
@@ -18696,7 +18929,7 @@
           <a:noFill/>
         </p:spPr>
         <p:txBody>
-          <a:bodyPr wrap="square" lIns="0" rIns="0" tIns="0" bIns="0">
+          <a:bodyPr wrap="square" lIns="0" tIns="0" rIns="0" bIns="0">
             <a:spAutoFit/>
           </a:bodyPr>
           <a:lstStyle/>
@@ -18759,6 +18992,7 @@
           <a:lstStyle/>
           <a:p>
             <a:pPr algn="ctr"/>
+            <a:endParaRPr/>
           </a:p>
         </p:txBody>
       </p:sp>
@@ -18779,7 +19013,7 @@
           <a:noFill/>
         </p:spPr>
         <p:txBody>
-          <a:bodyPr wrap="square" lIns="0" rIns="0" tIns="0" bIns="0">
+          <a:bodyPr wrap="square" lIns="0" tIns="0" rIns="0" bIns="0">
             <a:spAutoFit/>
           </a:bodyPr>
           <a:lstStyle/>
@@ -18818,7 +19052,7 @@
           <a:noFill/>
         </p:spPr>
         <p:txBody>
-          <a:bodyPr wrap="square" lIns="0" rIns="0" tIns="0" bIns="0">
+          <a:bodyPr wrap="square" lIns="0" tIns="0" rIns="0" bIns="0">
             <a:spAutoFit/>
           </a:bodyPr>
           <a:lstStyle/>
@@ -18881,6 +19115,7 @@
           <a:lstStyle/>
           <a:p>
             <a:pPr algn="ctr"/>
+            <a:endParaRPr/>
           </a:p>
         </p:txBody>
       </p:sp>
@@ -18901,7 +19136,7 @@
           <a:noFill/>
         </p:spPr>
         <p:txBody>
-          <a:bodyPr wrap="square" lIns="0" rIns="0" tIns="0" bIns="0">
+          <a:bodyPr wrap="square" lIns="0" tIns="0" rIns="0" bIns="0">
             <a:spAutoFit/>
           </a:bodyPr>
           <a:lstStyle/>
@@ -18940,7 +19175,7 @@
           <a:noFill/>
         </p:spPr>
         <p:txBody>
-          <a:bodyPr wrap="square" lIns="0" rIns="0" tIns="0" bIns="0">
+          <a:bodyPr wrap="square" lIns="0" tIns="0" rIns="0" bIns="0">
             <a:spAutoFit/>
           </a:bodyPr>
           <a:lstStyle/>
@@ -18979,7 +19214,7 @@
           <a:noFill/>
         </p:spPr>
         <p:txBody>
-          <a:bodyPr wrap="square" lIns="0" rIns="0" tIns="0" bIns="0">
+          <a:bodyPr wrap="square" lIns="0" tIns="0" rIns="0" bIns="0">
             <a:spAutoFit/>
           </a:bodyPr>
           <a:lstStyle/>
@@ -19018,7 +19253,7 @@
           <a:noFill/>
         </p:spPr>
         <p:txBody>
-          <a:bodyPr wrap="square" lIns="0" rIns="0" tIns="0" bIns="0">
+          <a:bodyPr wrap="square" lIns="0" tIns="0" rIns="0" bIns="0">
             <a:spAutoFit/>
           </a:bodyPr>
           <a:lstStyle/>
@@ -19081,6 +19316,7 @@
           <a:lstStyle/>
           <a:p>
             <a:pPr algn="ctr"/>
+            <a:endParaRPr/>
           </a:p>
         </p:txBody>
       </p:sp>
@@ -19101,7 +19337,7 @@
           <a:noFill/>
         </p:spPr>
         <p:txBody>
-          <a:bodyPr wrap="square" lIns="0" rIns="0" tIns="0" bIns="0">
+          <a:bodyPr wrap="square" lIns="0" tIns="0" rIns="0" bIns="0">
             <a:spAutoFit/>
           </a:bodyPr>
           <a:lstStyle/>
@@ -19140,7 +19376,7 @@
           <a:noFill/>
         </p:spPr>
         <p:txBody>
-          <a:bodyPr wrap="square" lIns="0" rIns="0" tIns="0" bIns="0">
+          <a:bodyPr wrap="square" lIns="0" tIns="0" rIns="0" bIns="0">
             <a:spAutoFit/>
           </a:bodyPr>
           <a:lstStyle/>
@@ -19179,7 +19415,7 @@
           <a:noFill/>
         </p:spPr>
         <p:txBody>
-          <a:bodyPr wrap="square" lIns="0" rIns="0" tIns="0" bIns="0">
+          <a:bodyPr wrap="square" lIns="0" tIns="0" rIns="0" bIns="0">
             <a:spAutoFit/>
           </a:bodyPr>
           <a:lstStyle/>
@@ -19218,7 +19454,7 @@
           <a:noFill/>
         </p:spPr>
         <p:txBody>
-          <a:bodyPr wrap="square" lIns="0" rIns="0" tIns="0" bIns="0">
+          <a:bodyPr wrap="square" lIns="0" tIns="0" rIns="0" bIns="0">
             <a:spAutoFit/>
           </a:bodyPr>
           <a:lstStyle/>
@@ -19281,6 +19517,7 @@
           <a:lstStyle/>
           <a:p>
             <a:pPr algn="ctr"/>
+            <a:endParaRPr/>
           </a:p>
         </p:txBody>
       </p:sp>
@@ -19301,7 +19538,7 @@
           <a:noFill/>
         </p:spPr>
         <p:txBody>
-          <a:bodyPr wrap="square" lIns="0" rIns="0" tIns="0" bIns="0">
+          <a:bodyPr wrap="square" lIns="0" tIns="0" rIns="0" bIns="0">
             <a:spAutoFit/>
           </a:bodyPr>
           <a:lstStyle/>
@@ -19340,7 +19577,7 @@
           <a:noFill/>
         </p:spPr>
         <p:txBody>
-          <a:bodyPr wrap="square" lIns="0" rIns="0" tIns="0" bIns="0">
+          <a:bodyPr wrap="square" lIns="0" tIns="0" rIns="0" bIns="0">
             <a:spAutoFit/>
           </a:bodyPr>
           <a:lstStyle/>
@@ -19379,7 +19616,7 @@
           <a:noFill/>
         </p:spPr>
         <p:txBody>
-          <a:bodyPr wrap="square" lIns="0" rIns="0" tIns="0" bIns="0">
+          <a:bodyPr wrap="square" lIns="0" tIns="0" rIns="0" bIns="0">
             <a:spAutoFit/>
           </a:bodyPr>
           <a:lstStyle/>
@@ -19418,7 +19655,7 @@
           <a:noFill/>
         </p:spPr>
         <p:txBody>
-          <a:bodyPr wrap="square" lIns="0" rIns="0" tIns="0" bIns="0">
+          <a:bodyPr wrap="square" lIns="0" tIns="0" rIns="0" bIns="0">
             <a:spAutoFit/>
           </a:bodyPr>
           <a:lstStyle/>
@@ -19481,6 +19718,7 @@
           <a:lstStyle/>
           <a:p>
             <a:pPr algn="ctr"/>
+            <a:endParaRPr/>
           </a:p>
         </p:txBody>
       </p:sp>
@@ -19525,6 +19763,7 @@
           <a:lstStyle/>
           <a:p>
             <a:pPr algn="ctr"/>
+            <a:endParaRPr/>
           </a:p>
         </p:txBody>
       </p:sp>
@@ -19545,7 +19784,7 @@
           <a:noFill/>
         </p:spPr>
         <p:txBody>
-          <a:bodyPr wrap="square" lIns="0" rIns="0" tIns="0" bIns="0">
+          <a:bodyPr wrap="square" lIns="0" tIns="0" rIns="0" bIns="0">
             <a:spAutoFit/>
           </a:bodyPr>
           <a:lstStyle/>
@@ -19584,7 +19823,7 @@
           <a:noFill/>
         </p:spPr>
         <p:txBody>
-          <a:bodyPr wrap="square" lIns="0" rIns="0" tIns="0" bIns="0">
+          <a:bodyPr wrap="square" lIns="0" tIns="0" rIns="0" bIns="0">
             <a:spAutoFit/>
           </a:bodyPr>
           <a:lstStyle/>
@@ -19679,7 +19918,7 @@
 </file>
 
 <file path=ppt/slides/slide6.xml><?xml version="1.0" encoding="utf-8"?>
-<p:sld xmlns:a="http://schemas.openxmlformats.org/drawingml/2006/main" xmlns:p="http://schemas.openxmlformats.org/presentationml/2006/main" xmlns:r="http://schemas.openxmlformats.org/officeDocument/2006/relationships">
+<p:sld xmlns:a="http://schemas.openxmlformats.org/drawingml/2006/main" xmlns:r="http://schemas.openxmlformats.org/officeDocument/2006/relationships" xmlns:p="http://schemas.openxmlformats.org/presentationml/2006/main">
   <p:cSld>
     <p:spTree>
       <p:nvGrpSpPr>
@@ -19687,7 +19926,14 @@
         <p:cNvGrpSpPr/>
         <p:nvPr/>
       </p:nvGrpSpPr>
-      <p:grpSpPr/>
+      <p:grpSpPr>
+        <a:xfrm>
+          <a:off x="0" y="0"/>
+          <a:ext cx="0" cy="0"/>
+          <a:chOff x="0" y="0"/>
+          <a:chExt cx="0" cy="0"/>
+        </a:xfrm>
+      </p:grpSpPr>
       <p:sp>
         <p:nvSpPr>
           <p:cNvPr id="2" name="Rectangle 1"/>
@@ -19729,6 +19975,7 @@
           <a:lstStyle/>
           <a:p>
             <a:pPr algn="ctr"/>
+            <a:endParaRPr/>
           </a:p>
         </p:txBody>
       </p:sp>
@@ -19749,7 +19996,7 @@
           <a:noFill/>
         </p:spPr>
         <p:txBody>
-          <a:bodyPr wrap="square" lIns="0" rIns="0" tIns="0" bIns="0">
+          <a:bodyPr wrap="square" lIns="0" tIns="0" rIns="0" bIns="0">
             <a:spAutoFit/>
           </a:bodyPr>
           <a:lstStyle/>
@@ -19788,7 +20035,7 @@
           <a:noFill/>
         </p:spPr>
         <p:txBody>
-          <a:bodyPr wrap="square" lIns="0" rIns="0" tIns="0" bIns="0">
+          <a:bodyPr wrap="square" lIns="0" tIns="0" rIns="0" bIns="0">
             <a:spAutoFit/>
           </a:bodyPr>
           <a:lstStyle/>
@@ -19851,6 +20098,7 @@
           <a:lstStyle/>
           <a:p>
             <a:pPr algn="ctr"/>
+            <a:endParaRPr/>
           </a:p>
         </p:txBody>
       </p:sp>
@@ -19871,7 +20119,7 @@
           <a:noFill/>
         </p:spPr>
         <p:txBody>
-          <a:bodyPr wrap="square" lIns="0" rIns="0" tIns="0" bIns="0">
+          <a:bodyPr wrap="square" lIns="0" tIns="0" rIns="0" bIns="0">
             <a:spAutoFit/>
           </a:bodyPr>
           <a:lstStyle/>
@@ -19910,7 +20158,7 @@
           <a:noFill/>
         </p:spPr>
         <p:txBody>
-          <a:bodyPr wrap="square" lIns="0" rIns="0" tIns="0" bIns="0">
+          <a:bodyPr wrap="square" lIns="0" tIns="0" rIns="0" bIns="0">
             <a:spAutoFit/>
           </a:bodyPr>
           <a:lstStyle/>
@@ -19973,6 +20221,7 @@
           <a:lstStyle/>
           <a:p>
             <a:pPr algn="ctr"/>
+            <a:endParaRPr/>
           </a:p>
         </p:txBody>
       </p:sp>
@@ -19993,7 +20242,7 @@
           <a:noFill/>
         </p:spPr>
         <p:txBody>
-          <a:bodyPr wrap="square" lIns="0" rIns="0" tIns="0" bIns="0">
+          <a:bodyPr wrap="square" lIns="0" tIns="0" rIns="0" bIns="0">
             <a:spAutoFit/>
           </a:bodyPr>
           <a:lstStyle/>
@@ -20032,7 +20281,7 @@
           <a:noFill/>
         </p:spPr>
         <p:txBody>
-          <a:bodyPr wrap="square" lIns="0" rIns="0" tIns="0" bIns="0">
+          <a:bodyPr wrap="square" lIns="0" tIns="0" rIns="0" bIns="0">
             <a:spAutoFit/>
           </a:bodyPr>
           <a:lstStyle/>
@@ -20071,7 +20320,7 @@
           <a:noFill/>
         </p:spPr>
         <p:txBody>
-          <a:bodyPr wrap="square" lIns="0" rIns="0" tIns="0" bIns="0">
+          <a:bodyPr wrap="square" lIns="0" tIns="0" rIns="0" bIns="0">
             <a:spAutoFit/>
           </a:bodyPr>
           <a:lstStyle/>
@@ -20110,7 +20359,7 @@
           <a:noFill/>
         </p:spPr>
         <p:txBody>
-          <a:bodyPr wrap="square" lIns="0" rIns="0" tIns="0" bIns="0">
+          <a:bodyPr wrap="square" lIns="0" tIns="0" rIns="0" bIns="0">
             <a:spAutoFit/>
           </a:bodyPr>
           <a:lstStyle/>
@@ -20173,6 +20422,7 @@
           <a:lstStyle/>
           <a:p>
             <a:pPr algn="ctr"/>
+            <a:endParaRPr/>
           </a:p>
         </p:txBody>
       </p:sp>
@@ -20193,7 +20443,7 @@
           <a:noFill/>
         </p:spPr>
         <p:txBody>
-          <a:bodyPr wrap="square" lIns="0" rIns="0" tIns="0" bIns="0">
+          <a:bodyPr wrap="square" lIns="0" tIns="0" rIns="0" bIns="0">
             <a:spAutoFit/>
           </a:bodyPr>
           <a:lstStyle/>
@@ -20232,7 +20482,7 @@
           <a:noFill/>
         </p:spPr>
         <p:txBody>
-          <a:bodyPr wrap="square" lIns="0" rIns="0" tIns="0" bIns="0">
+          <a:bodyPr wrap="square" lIns="0" tIns="0" rIns="0" bIns="0">
             <a:spAutoFit/>
           </a:bodyPr>
           <a:lstStyle/>
@@ -20271,7 +20521,7 @@
           <a:noFill/>
         </p:spPr>
         <p:txBody>
-          <a:bodyPr wrap="square" lIns="0" rIns="0" tIns="0" bIns="0">
+          <a:bodyPr wrap="square" lIns="0" tIns="0" rIns="0" bIns="0">
             <a:spAutoFit/>
           </a:bodyPr>
           <a:lstStyle/>
@@ -20310,7 +20560,7 @@
           <a:noFill/>
         </p:spPr>
         <p:txBody>
-          <a:bodyPr wrap="square" lIns="0" rIns="0" tIns="0" bIns="0">
+          <a:bodyPr wrap="square" lIns="0" tIns="0" rIns="0" bIns="0">
             <a:spAutoFit/>
           </a:bodyPr>
           <a:lstStyle/>
@@ -20373,6 +20623,7 @@
           <a:lstStyle/>
           <a:p>
             <a:pPr algn="ctr"/>
+            <a:endParaRPr/>
           </a:p>
         </p:txBody>
       </p:sp>
@@ -20393,7 +20644,7 @@
           <a:noFill/>
         </p:spPr>
         <p:txBody>
-          <a:bodyPr wrap="square" lIns="0" rIns="0" tIns="0" bIns="0">
+          <a:bodyPr wrap="square" lIns="0" tIns="0" rIns="0" bIns="0">
             <a:spAutoFit/>
           </a:bodyPr>
           <a:lstStyle/>
@@ -20432,7 +20683,7 @@
           <a:noFill/>
         </p:spPr>
         <p:txBody>
-          <a:bodyPr wrap="square" lIns="0" rIns="0" tIns="0" bIns="0">
+          <a:bodyPr wrap="square" lIns="0" tIns="0" rIns="0" bIns="0">
             <a:spAutoFit/>
           </a:bodyPr>
           <a:lstStyle/>
@@ -20471,7 +20722,7 @@
           <a:noFill/>
         </p:spPr>
         <p:txBody>
-          <a:bodyPr wrap="square" lIns="0" rIns="0" tIns="0" bIns="0">
+          <a:bodyPr wrap="square" lIns="0" tIns="0" rIns="0" bIns="0">
             <a:spAutoFit/>
           </a:bodyPr>
           <a:lstStyle/>
@@ -20510,7 +20761,7 @@
           <a:noFill/>
         </p:spPr>
         <p:txBody>
-          <a:bodyPr wrap="square" lIns="0" rIns="0" tIns="0" bIns="0">
+          <a:bodyPr wrap="square" lIns="0" tIns="0" rIns="0" bIns="0">
             <a:spAutoFit/>
           </a:bodyPr>
           <a:lstStyle/>
@@ -20573,6 +20824,7 @@
           <a:lstStyle/>
           <a:p>
             <a:pPr algn="ctr"/>
+            <a:endParaRPr/>
           </a:p>
         </p:txBody>
       </p:sp>
@@ -20593,7 +20845,7 @@
           <a:noFill/>
         </p:spPr>
         <p:txBody>
-          <a:bodyPr wrap="square" lIns="0" rIns="0" tIns="0" bIns="0">
+          <a:bodyPr wrap="square" lIns="0" tIns="0" rIns="0" bIns="0">
             <a:spAutoFit/>
           </a:bodyPr>
           <a:lstStyle/>
@@ -20632,7 +20884,7 @@
           <a:noFill/>
         </p:spPr>
         <p:txBody>
-          <a:bodyPr wrap="square" lIns="0" rIns="0" tIns="0" bIns="0">
+          <a:bodyPr wrap="square" lIns="0" tIns="0" rIns="0" bIns="0">
             <a:spAutoFit/>
           </a:bodyPr>
           <a:lstStyle/>
@@ -20671,7 +20923,7 @@
           <a:noFill/>
         </p:spPr>
         <p:txBody>
-          <a:bodyPr wrap="square" lIns="0" rIns="0" tIns="0" bIns="0">
+          <a:bodyPr wrap="square" lIns="0" tIns="0" rIns="0" bIns="0">
             <a:spAutoFit/>
           </a:bodyPr>
           <a:lstStyle/>
@@ -20710,7 +20962,7 @@
           <a:noFill/>
         </p:spPr>
         <p:txBody>
-          <a:bodyPr wrap="square" lIns="0" rIns="0" tIns="0" bIns="0">
+          <a:bodyPr wrap="square" lIns="0" tIns="0" rIns="0" bIns="0">
             <a:spAutoFit/>
           </a:bodyPr>
           <a:lstStyle/>
@@ -20773,6 +21025,7 @@
           <a:lstStyle/>
           <a:p>
             <a:pPr algn="ctr"/>
+            <a:endParaRPr/>
           </a:p>
         </p:txBody>
       </p:sp>
@@ -20817,6 +21070,7 @@
           <a:lstStyle/>
           <a:p>
             <a:pPr algn="ctr"/>
+            <a:endParaRPr/>
           </a:p>
         </p:txBody>
       </p:sp>
@@ -20837,7 +21091,7 @@
           <a:noFill/>
         </p:spPr>
         <p:txBody>
-          <a:bodyPr wrap="square" lIns="0" rIns="0" tIns="0" bIns="0">
+          <a:bodyPr wrap="square" lIns="0" tIns="0" rIns="0" bIns="0">
             <a:spAutoFit/>
           </a:bodyPr>
           <a:lstStyle/>
@@ -20876,7 +21130,7 @@
           <a:noFill/>
         </p:spPr>
         <p:txBody>
-          <a:bodyPr wrap="square" lIns="0" rIns="0" tIns="0" bIns="0">
+          <a:bodyPr wrap="square" lIns="0" tIns="0" rIns="0" bIns="0">
             <a:spAutoFit/>
           </a:bodyPr>
           <a:lstStyle/>
@@ -20955,7 +21209,7 @@
 </file>
 
 <file path=ppt/slides/slide7.xml><?xml version="1.0" encoding="utf-8"?>
-<p:sld xmlns:a="http://schemas.openxmlformats.org/drawingml/2006/main" xmlns:p="http://schemas.openxmlformats.org/presentationml/2006/main" xmlns:r="http://schemas.openxmlformats.org/officeDocument/2006/relationships">
+<p:sld xmlns:a="http://schemas.openxmlformats.org/drawingml/2006/main" xmlns:r="http://schemas.openxmlformats.org/officeDocument/2006/relationships" xmlns:p="http://schemas.openxmlformats.org/presentationml/2006/main">
   <p:cSld>
     <p:spTree>
       <p:nvGrpSpPr>
@@ -20963,7 +21217,14 @@
         <p:cNvGrpSpPr/>
         <p:nvPr/>
       </p:nvGrpSpPr>
-      <p:grpSpPr/>
+      <p:grpSpPr>
+        <a:xfrm>
+          <a:off x="0" y="0"/>
+          <a:ext cx="0" cy="0"/>
+          <a:chOff x="0" y="0"/>
+          <a:chExt cx="0" cy="0"/>
+        </a:xfrm>
+      </p:grpSpPr>
       <p:sp>
         <p:nvSpPr>
           <p:cNvPr id="2" name="Rectangle 1"/>
@@ -21005,6 +21266,7 @@
           <a:lstStyle/>
           <a:p>
             <a:pPr algn="ctr"/>
+            <a:endParaRPr/>
           </a:p>
         </p:txBody>
       </p:sp>
@@ -21049,6 +21311,7 @@
           <a:lstStyle/>
           <a:p>
             <a:pPr algn="ctr"/>
+            <a:endParaRPr/>
           </a:p>
         </p:txBody>
       </p:sp>
@@ -21069,7 +21332,7 @@
           <a:noFill/>
         </p:spPr>
         <p:txBody>
-          <a:bodyPr wrap="square" lIns="0" rIns="0" tIns="0" bIns="0">
+          <a:bodyPr wrap="square" lIns="0" tIns="0" rIns="0" bIns="0">
             <a:spAutoFit/>
           </a:bodyPr>
           <a:lstStyle/>
@@ -21108,7 +21371,7 @@
           <a:noFill/>
         </p:spPr>
         <p:txBody>
-          <a:bodyPr wrap="square" lIns="0" rIns="0" tIns="0" bIns="0">
+          <a:bodyPr wrap="square" lIns="0" tIns="0" rIns="0" bIns="0">
             <a:spAutoFit/>
           </a:bodyPr>
           <a:lstStyle/>
@@ -21155,7 +21418,7 @@
 </file>
 
 <file path=ppt/slides/slide8.xml><?xml version="1.0" encoding="utf-8"?>
-<p:sld xmlns:a="http://schemas.openxmlformats.org/drawingml/2006/main" xmlns:p="http://schemas.openxmlformats.org/presentationml/2006/main" xmlns:r="http://schemas.openxmlformats.org/officeDocument/2006/relationships">
+<p:sld xmlns:a="http://schemas.openxmlformats.org/drawingml/2006/main" xmlns:r="http://schemas.openxmlformats.org/officeDocument/2006/relationships" xmlns:p="http://schemas.openxmlformats.org/presentationml/2006/main">
   <p:cSld>
     <p:spTree>
       <p:nvGrpSpPr>
@@ -21163,7 +21426,14 @@
         <p:cNvGrpSpPr/>
         <p:nvPr/>
       </p:nvGrpSpPr>
-      <p:grpSpPr/>
+      <p:grpSpPr>
+        <a:xfrm>
+          <a:off x="0" y="0"/>
+          <a:ext cx="0" cy="0"/>
+          <a:chOff x="0" y="0"/>
+          <a:chExt cx="0" cy="0"/>
+        </a:xfrm>
+      </p:grpSpPr>
       <p:sp>
         <p:nvSpPr>
           <p:cNvPr id="2" name="Rectangle 1"/>
@@ -21205,6 +21475,7 @@
           <a:lstStyle/>
           <a:p>
             <a:pPr algn="ctr"/>
+            <a:endParaRPr/>
           </a:p>
         </p:txBody>
       </p:sp>
@@ -21225,7 +21496,7 @@
           <a:noFill/>
         </p:spPr>
         <p:txBody>
-          <a:bodyPr wrap="square" lIns="0" rIns="0" tIns="0" bIns="0">
+          <a:bodyPr wrap="square" lIns="0" tIns="0" rIns="0" bIns="0">
             <a:spAutoFit/>
           </a:bodyPr>
           <a:lstStyle/>
@@ -21264,7 +21535,7 @@
           <a:noFill/>
         </p:spPr>
         <p:txBody>
-          <a:bodyPr wrap="square" lIns="0" rIns="0" tIns="0" bIns="0">
+          <a:bodyPr wrap="square" lIns="0" tIns="0" rIns="0" bIns="0">
             <a:spAutoFit/>
           </a:bodyPr>
           <a:lstStyle/>
@@ -21327,6 +21598,7 @@
           <a:lstStyle/>
           <a:p>
             <a:pPr algn="ctr"/>
+            <a:endParaRPr/>
           </a:p>
         </p:txBody>
       </p:sp>
@@ -21347,7 +21619,7 @@
           <a:noFill/>
         </p:spPr>
         <p:txBody>
-          <a:bodyPr wrap="square" lIns="0" rIns="0" tIns="0" bIns="0">
+          <a:bodyPr wrap="square" lIns="0" tIns="0" rIns="0" bIns="0">
             <a:spAutoFit/>
           </a:bodyPr>
           <a:lstStyle/>
@@ -21386,7 +21658,7 @@
           <a:noFill/>
         </p:spPr>
         <p:txBody>
-          <a:bodyPr wrap="square" lIns="0" rIns="0" tIns="0" bIns="0">
+          <a:bodyPr wrap="square" lIns="0" tIns="0" rIns="0" bIns="0">
             <a:spAutoFit/>
           </a:bodyPr>
           <a:lstStyle/>
@@ -21425,7 +21697,7 @@
           <a:noFill/>
         </p:spPr>
         <p:txBody>
-          <a:bodyPr wrap="square" lIns="0" rIns="0" tIns="0" bIns="0">
+          <a:bodyPr wrap="square" lIns="0" tIns="0" rIns="0" bIns="0">
             <a:spAutoFit/>
           </a:bodyPr>
           <a:lstStyle/>
@@ -21536,6 +21808,7 @@
           <a:lstStyle/>
           <a:p>
             <a:pPr algn="ctr"/>
+            <a:endParaRPr/>
           </a:p>
         </p:txBody>
       </p:sp>
@@ -21556,7 +21829,7 @@
           <a:noFill/>
         </p:spPr>
         <p:txBody>
-          <a:bodyPr wrap="square" lIns="0" rIns="0" tIns="0" bIns="0">
+          <a:bodyPr wrap="square" lIns="0" tIns="0" rIns="0" bIns="0">
             <a:spAutoFit/>
           </a:bodyPr>
           <a:lstStyle/>
@@ -21595,7 +21868,7 @@
           <a:noFill/>
         </p:spPr>
         <p:txBody>
-          <a:bodyPr wrap="square" lIns="0" rIns="0" tIns="0" bIns="0">
+          <a:bodyPr wrap="square" lIns="0" tIns="0" rIns="0" bIns="0">
             <a:spAutoFit/>
           </a:bodyPr>
           <a:lstStyle/>
@@ -21666,7 +21939,7 @@
           <a:noFill/>
         </p:spPr>
         <p:txBody>
-          <a:bodyPr wrap="square" lIns="0" rIns="0" tIns="0" bIns="0">
+          <a:bodyPr wrap="square" lIns="0" tIns="0" rIns="0" bIns="0">
             <a:spAutoFit/>
           </a:bodyPr>
           <a:lstStyle/>
@@ -21697,7 +21970,7 @@
 </file>
 
 <file path=ppt/slides/slide9.xml><?xml version="1.0" encoding="utf-8"?>
-<p:sld xmlns:a="http://schemas.openxmlformats.org/drawingml/2006/main" xmlns:p="http://schemas.openxmlformats.org/presentationml/2006/main" xmlns:r="http://schemas.openxmlformats.org/officeDocument/2006/relationships">
+<p:sld xmlns:a="http://schemas.openxmlformats.org/drawingml/2006/main" xmlns:r="http://schemas.openxmlformats.org/officeDocument/2006/relationships" xmlns:p="http://schemas.openxmlformats.org/presentationml/2006/main">
   <p:cSld>
     <p:spTree>
       <p:nvGrpSpPr>
@@ -21705,7 +21978,14 @@
         <p:cNvGrpSpPr/>
         <p:nvPr/>
       </p:nvGrpSpPr>
-      <p:grpSpPr/>
+      <p:grpSpPr>
+        <a:xfrm>
+          <a:off x="0" y="0"/>
+          <a:ext cx="0" cy="0"/>
+          <a:chOff x="0" y="0"/>
+          <a:chExt cx="0" cy="0"/>
+        </a:xfrm>
+      </p:grpSpPr>
       <p:sp>
         <p:nvSpPr>
           <p:cNvPr id="2" name="Rectangle 1"/>
@@ -21747,6 +22027,7 @@
           <a:lstStyle/>
           <a:p>
             <a:pPr algn="ctr"/>
+            <a:endParaRPr/>
           </a:p>
         </p:txBody>
       </p:sp>
@@ -21767,7 +22048,7 @@
           <a:noFill/>
         </p:spPr>
         <p:txBody>
-          <a:bodyPr wrap="square" lIns="0" rIns="0" tIns="0" bIns="0">
+          <a:bodyPr wrap="square" lIns="0" tIns="0" rIns="0" bIns="0">
             <a:spAutoFit/>
           </a:bodyPr>
           <a:lstStyle/>
@@ -21806,7 +22087,7 @@
           <a:noFill/>
         </p:spPr>
         <p:txBody>
-          <a:bodyPr wrap="square" lIns="0" rIns="0" tIns="0" bIns="0">
+          <a:bodyPr wrap="square" lIns="0" tIns="0" rIns="0" bIns="0">
             <a:spAutoFit/>
           </a:bodyPr>
           <a:lstStyle/>
@@ -21869,6 +22150,7 @@
           <a:lstStyle/>
           <a:p>
             <a:pPr algn="ctr"/>
+            <a:endParaRPr/>
           </a:p>
         </p:txBody>
       </p:sp>
@@ -21889,7 +22171,7 @@
           <a:noFill/>
         </p:spPr>
         <p:txBody>
-          <a:bodyPr wrap="square" lIns="0" rIns="0" tIns="0" bIns="0">
+          <a:bodyPr wrap="square" lIns="0" tIns="0" rIns="0" bIns="0">
             <a:spAutoFit/>
           </a:bodyPr>
           <a:lstStyle/>
@@ -21928,7 +22210,7 @@
           <a:noFill/>
         </p:spPr>
         <p:txBody>
-          <a:bodyPr wrap="square" lIns="0" rIns="0" tIns="0" bIns="0">
+          <a:bodyPr wrap="square" lIns="0" tIns="0" rIns="0" bIns="0">
             <a:spAutoFit/>
           </a:bodyPr>
           <a:lstStyle/>
@@ -21967,7 +22249,7 @@
           <a:noFill/>
         </p:spPr>
         <p:txBody>
-          <a:bodyPr wrap="square" lIns="0" rIns="0" tIns="0" bIns="0">
+          <a:bodyPr wrap="square" lIns="0" tIns="0" rIns="0" bIns="0">
             <a:spAutoFit/>
           </a:bodyPr>
           <a:lstStyle/>
@@ -22078,6 +22360,7 @@
           <a:lstStyle/>
           <a:p>
             <a:pPr algn="ctr"/>
+            <a:endParaRPr/>
           </a:p>
         </p:txBody>
       </p:sp>
@@ -22098,7 +22381,7 @@
           <a:noFill/>
         </p:spPr>
         <p:txBody>
-          <a:bodyPr wrap="square" lIns="0" rIns="0" tIns="0" bIns="0">
+          <a:bodyPr wrap="square" lIns="0" tIns="0" rIns="0" bIns="0">
             <a:spAutoFit/>
           </a:bodyPr>
           <a:lstStyle/>
@@ -22137,7 +22420,7 @@
           <a:noFill/>
         </p:spPr>
         <p:txBody>
-          <a:bodyPr wrap="square" lIns="0" rIns="0" tIns="0" bIns="0">
+          <a:bodyPr wrap="square" lIns="0" tIns="0" rIns="0" bIns="0">
             <a:spAutoFit/>
           </a:bodyPr>
           <a:lstStyle/>
@@ -22208,7 +22491,7 @@
           <a:noFill/>
         </p:spPr>
         <p:txBody>
-          <a:bodyPr wrap="square" lIns="0" rIns="0" tIns="0" bIns="0">
+          <a:bodyPr wrap="square" lIns="0" tIns="0" rIns="0" bIns="0">
             <a:spAutoFit/>
           </a:bodyPr>
           <a:lstStyle/>
